--- a/club/application/pck2026/企画書/AsuLink.pptx
+++ b/club/application/pck2026/企画書/AsuLink.pptx
@@ -4,8 +4,18 @@
   <p:sldMasterIdLst>
     <p:sldMasterId id="2147483648" r:id="rId1"/>
   </p:sldMasterIdLst>
+  <p:notesMasterIdLst>
+    <p:notesMasterId r:id="rId10"/>
+  </p:notesMasterIdLst>
   <p:sldIdLst>
     <p:sldId id="256" r:id="rId2"/>
+    <p:sldId id="263" r:id="rId3"/>
+    <p:sldId id="264" r:id="rId4"/>
+    <p:sldId id="265" r:id="rId5"/>
+    <p:sldId id="259" r:id="rId6"/>
+    <p:sldId id="260" r:id="rId7"/>
+    <p:sldId id="261" r:id="rId8"/>
+    <p:sldId id="262" r:id="rId9"/>
   </p:sldIdLst>
   <p:sldSz cx="12192000" cy="6858000"/>
   <p:notesSz cx="6858000" cy="9144000"/>
@@ -104,7 +114,935 @@
       </a:defRPr>
     </a:lvl9pPr>
   </p:defaultTextStyle>
+  <p:extLst>
+    <p:ext uri="{EFAFB233-063F-42B5-8137-9DF3F51BA10A}">
+      <p15:sldGuideLst xmlns:p15="http://schemas.microsoft.com/office/powerpoint/2012/main"/>
+    </p:ext>
+  </p:extLst>
 </p:presentation>
+</file>
+
+<file path=ppt/notesMasters/notesMaster1.xml><?xml version="1.0" encoding="utf-8"?>
+<p:notesMaster xmlns:a="http://schemas.openxmlformats.org/drawingml/2006/main" xmlns:r="http://schemas.openxmlformats.org/officeDocument/2006/relationships" xmlns:p="http://schemas.openxmlformats.org/presentationml/2006/main">
+  <p:cSld>
+    <p:bg>
+      <p:bgRef idx="1001">
+        <a:schemeClr val="bg1"/>
+      </p:bgRef>
+    </p:bg>
+    <p:spTree>
+      <p:nvGrpSpPr>
+        <p:cNvPr id="1" name=""/>
+        <p:cNvGrpSpPr/>
+        <p:nvPr/>
+      </p:nvGrpSpPr>
+      <p:grpSpPr>
+        <a:xfrm>
+          <a:off x="0" y="0"/>
+          <a:ext cx="0" cy="0"/>
+          <a:chOff x="0" y="0"/>
+          <a:chExt cx="0" cy="0"/>
+        </a:xfrm>
+      </p:grpSpPr>
+      <p:sp>
+        <p:nvSpPr>
+          <p:cNvPr id="2" name="ヘッダー プレースホルダー 1"/>
+          <p:cNvSpPr>
+            <a:spLocks noGrp="1"/>
+          </p:cNvSpPr>
+          <p:nvPr>
+            <p:ph type="hdr" sz="quarter"/>
+          </p:nvPr>
+        </p:nvSpPr>
+        <p:spPr>
+          <a:xfrm>
+            <a:off x="0" y="0"/>
+            <a:ext cx="2971800" cy="458788"/>
+          </a:xfrm>
+          <a:prstGeom prst="rect">
+            <a:avLst/>
+          </a:prstGeom>
+        </p:spPr>
+        <p:txBody>
+          <a:bodyPr vert="horz" lIns="91440" tIns="45720" rIns="91440" bIns="45720" rtlCol="0"/>
+          <a:lstStyle>
+            <a:lvl1pPr algn="l">
+              <a:defRPr sz="1200"/>
+            </a:lvl1pPr>
+          </a:lstStyle>
+          <a:p>
+            <a:endParaRPr kumimoji="1" lang="ja-JP" altLang="en-US"/>
+          </a:p>
+        </p:txBody>
+      </p:sp>
+      <p:sp>
+        <p:nvSpPr>
+          <p:cNvPr id="3" name="日付プレースホルダー 2"/>
+          <p:cNvSpPr>
+            <a:spLocks noGrp="1"/>
+          </p:cNvSpPr>
+          <p:nvPr>
+            <p:ph type="dt" idx="1"/>
+          </p:nvPr>
+        </p:nvSpPr>
+        <p:spPr>
+          <a:xfrm>
+            <a:off x="3884613" y="0"/>
+            <a:ext cx="2971800" cy="458788"/>
+          </a:xfrm>
+          <a:prstGeom prst="rect">
+            <a:avLst/>
+          </a:prstGeom>
+        </p:spPr>
+        <p:txBody>
+          <a:bodyPr vert="horz" lIns="91440" tIns="45720" rIns="91440" bIns="45720" rtlCol="0"/>
+          <a:lstStyle>
+            <a:lvl1pPr algn="r">
+              <a:defRPr sz="1200"/>
+            </a:lvl1pPr>
+          </a:lstStyle>
+          <a:p>
+            <a:fld id="{49B332AB-A267-4A5B-BE9C-4BF8B7D5D16B}" type="datetimeFigureOut">
+              <a:rPr kumimoji="1" lang="ja-JP" altLang="en-US" smtClean="0"/>
+              <a:t>2026/6/4</a:t>
+            </a:fld>
+            <a:endParaRPr kumimoji="1" lang="ja-JP" altLang="en-US"/>
+          </a:p>
+        </p:txBody>
+      </p:sp>
+      <p:sp>
+        <p:nvSpPr>
+          <p:cNvPr id="4" name="スライド イメージ プレースホルダー 3"/>
+          <p:cNvSpPr>
+            <a:spLocks noGrp="1" noRot="1" noChangeAspect="1"/>
+          </p:cNvSpPr>
+          <p:nvPr>
+            <p:ph type="sldImg" idx="2"/>
+          </p:nvPr>
+        </p:nvSpPr>
+        <p:spPr>
+          <a:xfrm>
+            <a:off x="685800" y="1143000"/>
+            <a:ext cx="5486400" cy="3086100"/>
+          </a:xfrm>
+          <a:prstGeom prst="rect">
+            <a:avLst/>
+          </a:prstGeom>
+          <a:noFill/>
+          <a:ln w="12700">
+            <a:solidFill>
+              <a:prstClr val="black"/>
+            </a:solidFill>
+          </a:ln>
+        </p:spPr>
+        <p:txBody>
+          <a:bodyPr vert="horz" lIns="91440" tIns="45720" rIns="91440" bIns="45720" rtlCol="0" anchor="ctr"/>
+          <a:lstStyle/>
+          <a:p>
+            <a:endParaRPr lang="ja-JP" altLang="en-US"/>
+          </a:p>
+        </p:txBody>
+      </p:sp>
+      <p:sp>
+        <p:nvSpPr>
+          <p:cNvPr id="5" name="ノート プレースホルダー 4"/>
+          <p:cNvSpPr>
+            <a:spLocks noGrp="1"/>
+          </p:cNvSpPr>
+          <p:nvPr>
+            <p:ph type="body" sz="quarter" idx="3"/>
+          </p:nvPr>
+        </p:nvSpPr>
+        <p:spPr>
+          <a:xfrm>
+            <a:off x="685800" y="4400550"/>
+            <a:ext cx="5486400" cy="3600450"/>
+          </a:xfrm>
+          <a:prstGeom prst="rect">
+            <a:avLst/>
+          </a:prstGeom>
+        </p:spPr>
+        <p:txBody>
+          <a:bodyPr vert="horz" lIns="91440" tIns="45720" rIns="91440" bIns="45720" rtlCol="0"/>
+          <a:lstStyle/>
+          <a:p>
+            <a:pPr lvl="0"/>
+            <a:r>
+              <a:rPr kumimoji="1" lang="ja-JP" altLang="en-US"/>
+              <a:t>マスター テキストの書式設定</a:t>
+            </a:r>
+          </a:p>
+          <a:p>
+            <a:pPr lvl="1"/>
+            <a:r>
+              <a:rPr kumimoji="1" lang="ja-JP" altLang="en-US"/>
+              <a:t>第 </a:t>
+            </a:r>
+            <a:r>
+              <a:rPr kumimoji="1" lang="en-US" altLang="ja-JP"/>
+              <a:t>2 </a:t>
+            </a:r>
+            <a:r>
+              <a:rPr kumimoji="1" lang="ja-JP" altLang="en-US"/>
+              <a:t>レベル</a:t>
+            </a:r>
+          </a:p>
+          <a:p>
+            <a:pPr lvl="2"/>
+            <a:r>
+              <a:rPr kumimoji="1" lang="ja-JP" altLang="en-US"/>
+              <a:t>第 </a:t>
+            </a:r>
+            <a:r>
+              <a:rPr kumimoji="1" lang="en-US" altLang="ja-JP"/>
+              <a:t>3 </a:t>
+            </a:r>
+            <a:r>
+              <a:rPr kumimoji="1" lang="ja-JP" altLang="en-US"/>
+              <a:t>レベル</a:t>
+            </a:r>
+          </a:p>
+          <a:p>
+            <a:pPr lvl="3"/>
+            <a:r>
+              <a:rPr kumimoji="1" lang="ja-JP" altLang="en-US"/>
+              <a:t>第 </a:t>
+            </a:r>
+            <a:r>
+              <a:rPr kumimoji="1" lang="en-US" altLang="ja-JP"/>
+              <a:t>4 </a:t>
+            </a:r>
+            <a:r>
+              <a:rPr kumimoji="1" lang="ja-JP" altLang="en-US"/>
+              <a:t>レベル</a:t>
+            </a:r>
+          </a:p>
+          <a:p>
+            <a:pPr lvl="4"/>
+            <a:r>
+              <a:rPr kumimoji="1" lang="ja-JP" altLang="en-US"/>
+              <a:t>第 </a:t>
+            </a:r>
+            <a:r>
+              <a:rPr kumimoji="1" lang="en-US" altLang="ja-JP"/>
+              <a:t>5 </a:t>
+            </a:r>
+            <a:r>
+              <a:rPr kumimoji="1" lang="ja-JP" altLang="en-US"/>
+              <a:t>レベル</a:t>
+            </a:r>
+          </a:p>
+        </p:txBody>
+      </p:sp>
+      <p:sp>
+        <p:nvSpPr>
+          <p:cNvPr id="6" name="フッター プレースホルダー 5"/>
+          <p:cNvSpPr>
+            <a:spLocks noGrp="1"/>
+          </p:cNvSpPr>
+          <p:nvPr>
+            <p:ph type="ftr" sz="quarter" idx="4"/>
+          </p:nvPr>
+        </p:nvSpPr>
+        <p:spPr>
+          <a:xfrm>
+            <a:off x="0" y="8685213"/>
+            <a:ext cx="2971800" cy="458787"/>
+          </a:xfrm>
+          <a:prstGeom prst="rect">
+            <a:avLst/>
+          </a:prstGeom>
+        </p:spPr>
+        <p:txBody>
+          <a:bodyPr vert="horz" lIns="91440" tIns="45720" rIns="91440" bIns="45720" rtlCol="0" anchor="b"/>
+          <a:lstStyle>
+            <a:lvl1pPr algn="l">
+              <a:defRPr sz="1200"/>
+            </a:lvl1pPr>
+          </a:lstStyle>
+          <a:p>
+            <a:endParaRPr kumimoji="1" lang="ja-JP" altLang="en-US"/>
+          </a:p>
+        </p:txBody>
+      </p:sp>
+      <p:sp>
+        <p:nvSpPr>
+          <p:cNvPr id="7" name="スライド番号プレースホルダー 6"/>
+          <p:cNvSpPr>
+            <a:spLocks noGrp="1"/>
+          </p:cNvSpPr>
+          <p:nvPr>
+            <p:ph type="sldNum" sz="quarter" idx="5"/>
+          </p:nvPr>
+        </p:nvSpPr>
+        <p:spPr>
+          <a:xfrm>
+            <a:off x="3884613" y="8685213"/>
+            <a:ext cx="2971800" cy="458787"/>
+          </a:xfrm>
+          <a:prstGeom prst="rect">
+            <a:avLst/>
+          </a:prstGeom>
+        </p:spPr>
+        <p:txBody>
+          <a:bodyPr vert="horz" lIns="91440" tIns="45720" rIns="91440" bIns="45720" rtlCol="0" anchor="b"/>
+          <a:lstStyle>
+            <a:lvl1pPr algn="r">
+              <a:defRPr sz="1200"/>
+            </a:lvl1pPr>
+          </a:lstStyle>
+          <a:p>
+            <a:fld id="{A9879B2A-7434-4C1D-9BE0-78F344C99C47}" type="slidenum">
+              <a:rPr kumimoji="1" lang="ja-JP" altLang="en-US" smtClean="0"/>
+              <a:t>‹#›</a:t>
+            </a:fld>
+            <a:endParaRPr kumimoji="1" lang="ja-JP" altLang="en-US"/>
+          </a:p>
+        </p:txBody>
+      </p:sp>
+    </p:spTree>
+    <p:extLst>
+      <p:ext uri="{BB962C8B-B14F-4D97-AF65-F5344CB8AC3E}">
+        <p14:creationId xmlns:p14="http://schemas.microsoft.com/office/powerpoint/2010/main" val="2121404296"/>
+      </p:ext>
+    </p:extLst>
+  </p:cSld>
+  <p:clrMap bg1="lt1" tx1="dk1" bg2="lt2" tx2="dk2" accent1="accent1" accent2="accent2" accent3="accent3" accent4="accent4" accent5="accent5" accent6="accent6" hlink="hlink" folHlink="folHlink"/>
+  <p:notesStyle>
+    <a:lvl1pPr marL="0" algn="l" defTabSz="914400" rtl="0" eaLnBrk="1" latinLnBrk="0" hangingPunct="1">
+      <a:defRPr kumimoji="1" sz="1200" kern="1200">
+        <a:solidFill>
+          <a:schemeClr val="tx1"/>
+        </a:solidFill>
+        <a:latin typeface="+mn-lt"/>
+        <a:ea typeface="+mn-ea"/>
+        <a:cs typeface="+mn-cs"/>
+      </a:defRPr>
+    </a:lvl1pPr>
+    <a:lvl2pPr marL="457200" algn="l" defTabSz="914400" rtl="0" eaLnBrk="1" latinLnBrk="0" hangingPunct="1">
+      <a:defRPr kumimoji="1" sz="1200" kern="1200">
+        <a:solidFill>
+          <a:schemeClr val="tx1"/>
+        </a:solidFill>
+        <a:latin typeface="+mn-lt"/>
+        <a:ea typeface="+mn-ea"/>
+        <a:cs typeface="+mn-cs"/>
+      </a:defRPr>
+    </a:lvl2pPr>
+    <a:lvl3pPr marL="914400" algn="l" defTabSz="914400" rtl="0" eaLnBrk="1" latinLnBrk="0" hangingPunct="1">
+      <a:defRPr kumimoji="1" sz="1200" kern="1200">
+        <a:solidFill>
+          <a:schemeClr val="tx1"/>
+        </a:solidFill>
+        <a:latin typeface="+mn-lt"/>
+        <a:ea typeface="+mn-ea"/>
+        <a:cs typeface="+mn-cs"/>
+      </a:defRPr>
+    </a:lvl3pPr>
+    <a:lvl4pPr marL="1371600" algn="l" defTabSz="914400" rtl="0" eaLnBrk="1" latinLnBrk="0" hangingPunct="1">
+      <a:defRPr kumimoji="1" sz="1200" kern="1200">
+        <a:solidFill>
+          <a:schemeClr val="tx1"/>
+        </a:solidFill>
+        <a:latin typeface="+mn-lt"/>
+        <a:ea typeface="+mn-ea"/>
+        <a:cs typeface="+mn-cs"/>
+      </a:defRPr>
+    </a:lvl4pPr>
+    <a:lvl5pPr marL="1828800" algn="l" defTabSz="914400" rtl="0" eaLnBrk="1" latinLnBrk="0" hangingPunct="1">
+      <a:defRPr kumimoji="1" sz="1200" kern="1200">
+        <a:solidFill>
+          <a:schemeClr val="tx1"/>
+        </a:solidFill>
+        <a:latin typeface="+mn-lt"/>
+        <a:ea typeface="+mn-ea"/>
+        <a:cs typeface="+mn-cs"/>
+      </a:defRPr>
+    </a:lvl5pPr>
+    <a:lvl6pPr marL="2286000" algn="l" defTabSz="914400" rtl="0" eaLnBrk="1" latinLnBrk="0" hangingPunct="1">
+      <a:defRPr kumimoji="1" sz="1200" kern="1200">
+        <a:solidFill>
+          <a:schemeClr val="tx1"/>
+        </a:solidFill>
+        <a:latin typeface="+mn-lt"/>
+        <a:ea typeface="+mn-ea"/>
+        <a:cs typeface="+mn-cs"/>
+      </a:defRPr>
+    </a:lvl6pPr>
+    <a:lvl7pPr marL="2743200" algn="l" defTabSz="914400" rtl="0" eaLnBrk="1" latinLnBrk="0" hangingPunct="1">
+      <a:defRPr kumimoji="1" sz="1200" kern="1200">
+        <a:solidFill>
+          <a:schemeClr val="tx1"/>
+        </a:solidFill>
+        <a:latin typeface="+mn-lt"/>
+        <a:ea typeface="+mn-ea"/>
+        <a:cs typeface="+mn-cs"/>
+      </a:defRPr>
+    </a:lvl7pPr>
+    <a:lvl8pPr marL="3200400" algn="l" defTabSz="914400" rtl="0" eaLnBrk="1" latinLnBrk="0" hangingPunct="1">
+      <a:defRPr kumimoji="1" sz="1200" kern="1200">
+        <a:solidFill>
+          <a:schemeClr val="tx1"/>
+        </a:solidFill>
+        <a:latin typeface="+mn-lt"/>
+        <a:ea typeface="+mn-ea"/>
+        <a:cs typeface="+mn-cs"/>
+      </a:defRPr>
+    </a:lvl8pPr>
+    <a:lvl9pPr marL="3657600" algn="l" defTabSz="914400" rtl="0" eaLnBrk="1" latinLnBrk="0" hangingPunct="1">
+      <a:defRPr kumimoji="1" sz="1200" kern="1200">
+        <a:solidFill>
+          <a:schemeClr val="tx1"/>
+        </a:solidFill>
+        <a:latin typeface="+mn-lt"/>
+        <a:ea typeface="+mn-ea"/>
+        <a:cs typeface="+mn-cs"/>
+      </a:defRPr>
+    </a:lvl9pPr>
+  </p:notesStyle>
+</p:notesMaster>
+</file>
+
+<file path=ppt/notesSlides/notesSlide1.xml><?xml version="1.0" encoding="utf-8"?>
+<p:notes xmlns:a="http://schemas.openxmlformats.org/drawingml/2006/main" xmlns:r="http://schemas.openxmlformats.org/officeDocument/2006/relationships" xmlns:p="http://schemas.openxmlformats.org/presentationml/2006/main">
+  <p:cSld>
+    <p:spTree>
+      <p:nvGrpSpPr>
+        <p:cNvPr id="1" name=""/>
+        <p:cNvGrpSpPr/>
+        <p:nvPr/>
+      </p:nvGrpSpPr>
+      <p:grpSpPr>
+        <a:xfrm>
+          <a:off x="0" y="0"/>
+          <a:ext cx="0" cy="0"/>
+          <a:chOff x="0" y="0"/>
+          <a:chExt cx="0" cy="0"/>
+        </a:xfrm>
+      </p:grpSpPr>
+      <p:sp>
+        <p:nvSpPr>
+          <p:cNvPr id="2" name="スライド イメージ プレースホルダー 1"/>
+          <p:cNvSpPr>
+            <a:spLocks noGrp="1" noRot="1" noChangeAspect="1"/>
+          </p:cNvSpPr>
+          <p:nvPr>
+            <p:ph type="sldImg"/>
+          </p:nvPr>
+        </p:nvSpPr>
+        <p:spPr/>
+      </p:sp>
+      <p:sp>
+        <p:nvSpPr>
+          <p:cNvPr id="3" name="ノート プレースホルダー 2"/>
+          <p:cNvSpPr>
+            <a:spLocks noGrp="1"/>
+          </p:cNvSpPr>
+          <p:nvPr>
+            <p:ph type="body" idx="1"/>
+          </p:nvPr>
+        </p:nvSpPr>
+        <p:spPr/>
+        <p:txBody>
+          <a:bodyPr/>
+          <a:lstStyle/>
+          <a:p>
+            <a:r>
+              <a:rPr kumimoji="1" lang="ja-JP" altLang="en-US" dirty="0"/>
+              <a:t>今の社会は、人と人との距離を物理的距離でなく</a:t>
+            </a:r>
+            <a:r>
+              <a:rPr kumimoji="1" lang="en-US" altLang="ja-JP" dirty="0"/>
+              <a:t>”</a:t>
+            </a:r>
+            <a:r>
+              <a:rPr kumimoji="1" lang="ja-JP" altLang="en-US" dirty="0"/>
+              <a:t>つながり方</a:t>
+            </a:r>
+            <a:r>
+              <a:rPr kumimoji="1" lang="en-US" altLang="ja-JP" dirty="0"/>
+              <a:t>”</a:t>
+            </a:r>
+            <a:r>
+              <a:rPr kumimoji="1" lang="ja-JP" altLang="en-US" dirty="0"/>
+              <a:t>で決める社会になりました。</a:t>
+            </a:r>
+            <a:endParaRPr kumimoji="1" lang="en-US" altLang="ja-JP" dirty="0"/>
+          </a:p>
+          <a:p>
+            <a:r>
+              <a:rPr kumimoji="1" lang="ja-JP" altLang="en-US" dirty="0"/>
+              <a:t>（これがどういうことかというと）</a:t>
+            </a:r>
+            <a:endParaRPr kumimoji="1" lang="en-US" altLang="ja-JP" dirty="0"/>
+          </a:p>
+          <a:p>
+            <a:r>
+              <a:rPr kumimoji="1" lang="ja-JP" altLang="en-US" dirty="0"/>
+              <a:t>スマホが普及した今の社会では、遠くの人と簡単に繋がれるようになりました。</a:t>
+            </a:r>
+            <a:endParaRPr kumimoji="1" lang="en-US" altLang="ja-JP" dirty="0"/>
+          </a:p>
+          <a:p>
+            <a:r>
+              <a:rPr kumimoji="1" lang="ja-JP" altLang="en-US" dirty="0"/>
+              <a:t>見知らぬ人とでも簡単に、</a:t>
+            </a:r>
+            <a:r>
+              <a:rPr kumimoji="1" lang="en-US" altLang="ja-JP" dirty="0"/>
+              <a:t>SNS</a:t>
+            </a:r>
+            <a:r>
+              <a:rPr kumimoji="1" lang="ja-JP" altLang="en-US" dirty="0"/>
+              <a:t>などもその一例で、人と人との距離は縮まっているように見えます。</a:t>
+            </a:r>
+            <a:endParaRPr kumimoji="1" lang="en-US" altLang="ja-JP" dirty="0"/>
+          </a:p>
+          <a:p>
+            <a:r>
+              <a:rPr kumimoji="1" lang="ja-JP" altLang="en-US" dirty="0"/>
+              <a:t>ただ、これは文字だけの会話など「機械的なやりとり」であると感じ、人と人との関わりによって生まれる温かさなどが薄れているのではと感じます。</a:t>
+            </a:r>
+            <a:endParaRPr kumimoji="1" lang="en-US" altLang="ja-JP" dirty="0"/>
+          </a:p>
+          <a:p>
+            <a:pPr marL="0" marR="0" lvl="0" indent="0" algn="l" defTabSz="914400" rtl="0" eaLnBrk="1" fontAlgn="auto" latinLnBrk="0" hangingPunct="1">
+              <a:lnSpc>
+                <a:spcPct val="100000"/>
+              </a:lnSpc>
+              <a:spcBef>
+                <a:spcPts val="0"/>
+              </a:spcBef>
+              <a:spcAft>
+                <a:spcPts val="0"/>
+              </a:spcAft>
+              <a:buClrTx/>
+              <a:buSzTx/>
+              <a:buFontTx/>
+              <a:buNone/>
+              <a:tabLst/>
+              <a:defRPr/>
+            </a:pPr>
+            <a:r>
+              <a:rPr kumimoji="1" lang="ja-JP" altLang="en-US" dirty="0"/>
+              <a:t>これは、家族も例外でなく、メッセージアプリを使った温かさの無いやりとりが増えていると思います。</a:t>
+            </a:r>
+            <a:endParaRPr kumimoji="1" lang="en-US" altLang="ja-JP" dirty="0"/>
+          </a:p>
+          <a:p>
+            <a:endParaRPr kumimoji="1" lang="en-US" altLang="ja-JP" dirty="0"/>
+          </a:p>
+        </p:txBody>
+      </p:sp>
+      <p:sp>
+        <p:nvSpPr>
+          <p:cNvPr id="4" name="スライド番号プレースホルダー 3"/>
+          <p:cNvSpPr>
+            <a:spLocks noGrp="1"/>
+          </p:cNvSpPr>
+          <p:nvPr>
+            <p:ph type="sldNum" sz="quarter" idx="5"/>
+          </p:nvPr>
+        </p:nvSpPr>
+        <p:spPr/>
+        <p:txBody>
+          <a:bodyPr/>
+          <a:lstStyle/>
+          <a:p>
+            <a:fld id="{A9879B2A-7434-4C1D-9BE0-78F344C99C47}" type="slidenum">
+              <a:rPr kumimoji="1" lang="ja-JP" altLang="en-US" smtClean="0"/>
+              <a:t>2</a:t>
+            </a:fld>
+            <a:endParaRPr kumimoji="1" lang="ja-JP" altLang="en-US"/>
+          </a:p>
+        </p:txBody>
+      </p:sp>
+    </p:spTree>
+    <p:extLst>
+      <p:ext uri="{BB962C8B-B14F-4D97-AF65-F5344CB8AC3E}">
+        <p14:creationId xmlns:p14="http://schemas.microsoft.com/office/powerpoint/2010/main" val="585928779"/>
+      </p:ext>
+    </p:extLst>
+  </p:cSld>
+  <p:clrMapOvr>
+    <a:masterClrMapping/>
+  </p:clrMapOvr>
+</p:notes>
+</file>
+
+<file path=ppt/notesSlides/notesSlide2.xml><?xml version="1.0" encoding="utf-8"?>
+<p:notes xmlns:a="http://schemas.openxmlformats.org/drawingml/2006/main" xmlns:r="http://schemas.openxmlformats.org/officeDocument/2006/relationships" xmlns:p="http://schemas.openxmlformats.org/presentationml/2006/main">
+  <p:cSld>
+    <p:spTree>
+      <p:nvGrpSpPr>
+        <p:cNvPr id="1" name=""/>
+        <p:cNvGrpSpPr/>
+        <p:nvPr/>
+      </p:nvGrpSpPr>
+      <p:grpSpPr>
+        <a:xfrm>
+          <a:off x="0" y="0"/>
+          <a:ext cx="0" cy="0"/>
+          <a:chOff x="0" y="0"/>
+          <a:chExt cx="0" cy="0"/>
+        </a:xfrm>
+      </p:grpSpPr>
+      <p:sp>
+        <p:nvSpPr>
+          <p:cNvPr id="2" name="スライド イメージ プレースホルダー 1"/>
+          <p:cNvSpPr>
+            <a:spLocks noGrp="1" noRot="1" noChangeAspect="1"/>
+          </p:cNvSpPr>
+          <p:nvPr>
+            <p:ph type="sldImg"/>
+          </p:nvPr>
+        </p:nvSpPr>
+        <p:spPr/>
+      </p:sp>
+      <p:sp>
+        <p:nvSpPr>
+          <p:cNvPr id="3" name="ノート プレースホルダー 2"/>
+          <p:cNvSpPr>
+            <a:spLocks noGrp="1"/>
+          </p:cNvSpPr>
+          <p:nvPr>
+            <p:ph type="body" idx="1"/>
+          </p:nvPr>
+        </p:nvSpPr>
+        <p:spPr/>
+        <p:txBody>
+          <a:bodyPr/>
+          <a:lstStyle/>
+          <a:p>
+            <a:r>
+              <a:rPr kumimoji="1" lang="ja-JP" altLang="en-US" dirty="0"/>
+              <a:t>家族との距離感について考えてみます。</a:t>
+            </a:r>
+            <a:endParaRPr kumimoji="1" lang="en-US" altLang="ja-JP" dirty="0"/>
+          </a:p>
+          <a:p>
+            <a:endParaRPr kumimoji="1" lang="en-US" altLang="ja-JP" dirty="0"/>
+          </a:p>
+          <a:p>
+            <a:r>
+              <a:rPr kumimoji="1" lang="ja-JP" altLang="en-US" dirty="0"/>
+              <a:t>これは、今家族の繋がりが薄れているかどうかアンケートしたグラフです（後日記載）</a:t>
+            </a:r>
+            <a:endParaRPr kumimoji="1" lang="en-US" altLang="ja-JP" dirty="0"/>
+          </a:p>
+          <a:p>
+            <a:endParaRPr kumimoji="1" lang="en-US" altLang="ja-JP" dirty="0"/>
+          </a:p>
+          <a:p>
+            <a:r>
+              <a:rPr kumimoji="1" lang="ja-JP" altLang="en-US" dirty="0"/>
+              <a:t>このように、家族間の繋がりが薄れているのではと感じている人は意外と多いのです。</a:t>
+            </a:r>
+            <a:endParaRPr kumimoji="1" lang="en-US" altLang="ja-JP" dirty="0"/>
+          </a:p>
+          <a:p>
+            <a:r>
+              <a:rPr kumimoji="1" lang="ja-JP" altLang="en-US" dirty="0"/>
+              <a:t>原因として、先ほど述べた、家族間が「機械的な繋がり」になってしまっていることに加え、</a:t>
+            </a:r>
+            <a:endParaRPr kumimoji="1" lang="en-US" altLang="ja-JP" dirty="0"/>
+          </a:p>
+          <a:p>
+            <a:r>
+              <a:rPr kumimoji="1" lang="ja-JP" altLang="en-US" dirty="0"/>
+              <a:t>遠く離れている人と関わることができるからこそ、家族と話している時間は減っているのではと感じました。</a:t>
+            </a:r>
+            <a:endParaRPr kumimoji="1" lang="en-US" altLang="ja-JP" dirty="0"/>
+          </a:p>
+          <a:p>
+            <a:r>
+              <a:rPr kumimoji="1" lang="ja-JP" altLang="en-US" dirty="0"/>
+              <a:t>身近だからこそ、離れている人とつながることが出来るスマホという文明は、家族との距離を遠ざけているように思います。</a:t>
+            </a:r>
+            <a:endParaRPr kumimoji="1" lang="en-US" altLang="ja-JP" dirty="0"/>
+          </a:p>
+        </p:txBody>
+      </p:sp>
+      <p:sp>
+        <p:nvSpPr>
+          <p:cNvPr id="4" name="スライド番号プレースホルダー 3"/>
+          <p:cNvSpPr>
+            <a:spLocks noGrp="1"/>
+          </p:cNvSpPr>
+          <p:nvPr>
+            <p:ph type="sldNum" sz="quarter" idx="5"/>
+          </p:nvPr>
+        </p:nvSpPr>
+        <p:spPr/>
+        <p:txBody>
+          <a:bodyPr/>
+          <a:lstStyle/>
+          <a:p>
+            <a:fld id="{A9879B2A-7434-4C1D-9BE0-78F344C99C47}" type="slidenum">
+              <a:rPr kumimoji="1" lang="ja-JP" altLang="en-US" smtClean="0"/>
+              <a:t>3</a:t>
+            </a:fld>
+            <a:endParaRPr kumimoji="1" lang="ja-JP" altLang="en-US"/>
+          </a:p>
+        </p:txBody>
+      </p:sp>
+    </p:spTree>
+    <p:extLst>
+      <p:ext uri="{BB962C8B-B14F-4D97-AF65-F5344CB8AC3E}">
+        <p14:creationId xmlns:p14="http://schemas.microsoft.com/office/powerpoint/2010/main" val="2154401117"/>
+      </p:ext>
+    </p:extLst>
+  </p:cSld>
+  <p:clrMapOvr>
+    <a:masterClrMapping/>
+  </p:clrMapOvr>
+</p:notes>
+</file>
+
+<file path=ppt/notesSlides/notesSlide3.xml><?xml version="1.0" encoding="utf-8"?>
+<p:notes xmlns:a="http://schemas.openxmlformats.org/drawingml/2006/main" xmlns:r="http://schemas.openxmlformats.org/officeDocument/2006/relationships" xmlns:p="http://schemas.openxmlformats.org/presentationml/2006/main">
+  <p:cSld>
+    <p:spTree>
+      <p:nvGrpSpPr>
+        <p:cNvPr id="1" name=""/>
+        <p:cNvGrpSpPr/>
+        <p:nvPr/>
+      </p:nvGrpSpPr>
+      <p:grpSpPr>
+        <a:xfrm>
+          <a:off x="0" y="0"/>
+          <a:ext cx="0" cy="0"/>
+          <a:chOff x="0" y="0"/>
+          <a:chExt cx="0" cy="0"/>
+        </a:xfrm>
+      </p:grpSpPr>
+      <p:sp>
+        <p:nvSpPr>
+          <p:cNvPr id="2" name="スライド イメージ プレースホルダー 1"/>
+          <p:cNvSpPr>
+            <a:spLocks noGrp="1" noRot="1" noChangeAspect="1"/>
+          </p:cNvSpPr>
+          <p:nvPr>
+            <p:ph type="sldImg"/>
+          </p:nvPr>
+        </p:nvSpPr>
+        <p:spPr/>
+      </p:sp>
+      <p:sp>
+        <p:nvSpPr>
+          <p:cNvPr id="3" name="ノート プレースホルダー 2"/>
+          <p:cNvSpPr>
+            <a:spLocks noGrp="1"/>
+          </p:cNvSpPr>
+          <p:nvPr>
+            <p:ph type="body" idx="1"/>
+          </p:nvPr>
+        </p:nvSpPr>
+        <p:spPr/>
+        <p:txBody>
+          <a:bodyPr/>
+          <a:lstStyle/>
+          <a:p>
+            <a:r>
+              <a:rPr kumimoji="1" lang="ja-JP" altLang="en-US" dirty="0"/>
+              <a:t>ここで、私たちが注目したのが「アルバム」です。</a:t>
+            </a:r>
+            <a:endParaRPr kumimoji="1" lang="en-US" altLang="ja-JP" dirty="0"/>
+          </a:p>
+          <a:p>
+            <a:r>
+              <a:rPr kumimoji="1" lang="ja-JP" altLang="en-US" dirty="0"/>
+              <a:t>今の生活にアルバムというものがどれだけあるでしょうか。</a:t>
+            </a:r>
+            <a:endParaRPr kumimoji="1" lang="en-US" altLang="ja-JP" dirty="0"/>
+          </a:p>
+          <a:p>
+            <a:r>
+              <a:rPr kumimoji="1" lang="ja-JP" altLang="en-US" dirty="0"/>
+              <a:t>今現在もアルバムを作っているという家庭もあるでしょうが、スマホが普及し、デジタル化が進んだことでアルバムというものが私たちの生活から薄れているのではと思います。</a:t>
+            </a:r>
+            <a:endParaRPr kumimoji="1" lang="en-US" altLang="ja-JP" dirty="0"/>
+          </a:p>
+          <a:p>
+            <a:r>
+              <a:rPr kumimoji="1" lang="ja-JP" altLang="en-US" dirty="0"/>
+              <a:t>ここで、アンケート（後日）</a:t>
+            </a:r>
+            <a:endParaRPr kumimoji="1" lang="en-US" altLang="ja-JP" dirty="0"/>
+          </a:p>
+          <a:p>
+            <a:endParaRPr kumimoji="1" lang="en-US" altLang="ja-JP" dirty="0"/>
+          </a:p>
+          <a:p>
+            <a:r>
+              <a:rPr kumimoji="1" lang="ja-JP" altLang="en-US" dirty="0"/>
+              <a:t>スマホが普及したことで、記録している写真や動画などの記録は増えているはずなんです。</a:t>
+            </a:r>
+            <a:endParaRPr kumimoji="1" lang="en-US" altLang="ja-JP" dirty="0"/>
+          </a:p>
+          <a:p>
+            <a:r>
+              <a:rPr kumimoji="1" lang="ja-JP" altLang="en-US" dirty="0"/>
+              <a:t>アナログのカメラで撮っていた時代より確実に増えているはずなのに、家族と共有するという繋がりは減っているのです。</a:t>
+            </a:r>
+            <a:endParaRPr kumimoji="1" lang="en-US" altLang="ja-JP" dirty="0"/>
+          </a:p>
+          <a:p>
+            <a:endParaRPr kumimoji="1" lang="ja-JP" altLang="en-US" dirty="0"/>
+          </a:p>
+        </p:txBody>
+      </p:sp>
+      <p:sp>
+        <p:nvSpPr>
+          <p:cNvPr id="4" name="スライド番号プレースホルダー 3"/>
+          <p:cNvSpPr>
+            <a:spLocks noGrp="1"/>
+          </p:cNvSpPr>
+          <p:nvPr>
+            <p:ph type="sldNum" sz="quarter" idx="5"/>
+          </p:nvPr>
+        </p:nvSpPr>
+        <p:spPr/>
+        <p:txBody>
+          <a:bodyPr/>
+          <a:lstStyle/>
+          <a:p>
+            <a:fld id="{A9879B2A-7434-4C1D-9BE0-78F344C99C47}" type="slidenum">
+              <a:rPr kumimoji="1" lang="ja-JP" altLang="en-US" smtClean="0"/>
+              <a:t>4</a:t>
+            </a:fld>
+            <a:endParaRPr kumimoji="1" lang="ja-JP" altLang="en-US"/>
+          </a:p>
+        </p:txBody>
+      </p:sp>
+    </p:spTree>
+    <p:extLst>
+      <p:ext uri="{BB962C8B-B14F-4D97-AF65-F5344CB8AC3E}">
+        <p14:creationId xmlns:p14="http://schemas.microsoft.com/office/powerpoint/2010/main" val="3465425058"/>
+      </p:ext>
+    </p:extLst>
+  </p:cSld>
+  <p:clrMapOvr>
+    <a:masterClrMapping/>
+  </p:clrMapOvr>
+</p:notes>
+</file>
+
+<file path=ppt/notesSlides/notesSlide4.xml><?xml version="1.0" encoding="utf-8"?>
+<p:notes xmlns:a="http://schemas.openxmlformats.org/drawingml/2006/main" xmlns:r="http://schemas.openxmlformats.org/officeDocument/2006/relationships" xmlns:p="http://schemas.openxmlformats.org/presentationml/2006/main">
+  <p:cSld>
+    <p:spTree>
+      <p:nvGrpSpPr>
+        <p:cNvPr id="1" name=""/>
+        <p:cNvGrpSpPr/>
+        <p:nvPr/>
+      </p:nvGrpSpPr>
+      <p:grpSpPr>
+        <a:xfrm>
+          <a:off x="0" y="0"/>
+          <a:ext cx="0" cy="0"/>
+          <a:chOff x="0" y="0"/>
+          <a:chExt cx="0" cy="0"/>
+        </a:xfrm>
+      </p:grpSpPr>
+      <p:sp>
+        <p:nvSpPr>
+          <p:cNvPr id="2" name="スライド イメージ プレースホルダー 1"/>
+          <p:cNvSpPr>
+            <a:spLocks noGrp="1" noRot="1" noChangeAspect="1"/>
+          </p:cNvSpPr>
+          <p:nvPr>
+            <p:ph type="sldImg"/>
+          </p:nvPr>
+        </p:nvSpPr>
+        <p:spPr/>
+      </p:sp>
+      <p:sp>
+        <p:nvSpPr>
+          <p:cNvPr id="3" name="ノート プレースホルダー 2"/>
+          <p:cNvSpPr>
+            <a:spLocks noGrp="1"/>
+          </p:cNvSpPr>
+          <p:nvPr>
+            <p:ph type="body" idx="1"/>
+          </p:nvPr>
+        </p:nvSpPr>
+        <p:spPr/>
+        <p:txBody>
+          <a:bodyPr/>
+          <a:lstStyle/>
+          <a:p>
+            <a:r>
+              <a:rPr kumimoji="1" lang="ja-JP" altLang="en-US" dirty="0"/>
+              <a:t>そこで、私たちは「</a:t>
+            </a:r>
+            <a:r>
+              <a:rPr kumimoji="1" lang="en-US" altLang="ja-JP" dirty="0" err="1"/>
+              <a:t>AsuLink</a:t>
+            </a:r>
+            <a:r>
+              <a:rPr kumimoji="1" lang="ja-JP" altLang="en-US" dirty="0"/>
+              <a:t>」を提案します。</a:t>
+            </a:r>
+            <a:endParaRPr kumimoji="1" lang="en-US" altLang="ja-JP" dirty="0"/>
+          </a:p>
+          <a:p>
+            <a:r>
+              <a:rPr kumimoji="1" lang="ja-JP" altLang="en-US" dirty="0"/>
+              <a:t>（家族間の繋がりを深めるとともに、思い出を通して明日につなげるアプリ）</a:t>
+            </a:r>
+            <a:endParaRPr kumimoji="1" lang="en-US" altLang="ja-JP" dirty="0"/>
+          </a:p>
+          <a:p>
+            <a:r>
+              <a:rPr kumimoji="1" lang="ja-JP" altLang="en-US" dirty="0"/>
+              <a:t>家族団欒のきっかけになる、過去の思い出を「家族みんなで」体験する。</a:t>
+            </a:r>
+            <a:endParaRPr kumimoji="1" lang="en-US" altLang="ja-JP" dirty="0"/>
+          </a:p>
+          <a:p>
+            <a:r>
+              <a:rPr kumimoji="1" lang="ja-JP" altLang="en-US" dirty="0"/>
+              <a:t>眠った家族の思い出を掘り起こして、家族が集まるきっかけとなるアプリを目指します。</a:t>
+            </a:r>
+            <a:endParaRPr kumimoji="1" lang="en-US" altLang="ja-JP" dirty="0"/>
+          </a:p>
+        </p:txBody>
+      </p:sp>
+      <p:sp>
+        <p:nvSpPr>
+          <p:cNvPr id="4" name="スライド番号プレースホルダー 3"/>
+          <p:cNvSpPr>
+            <a:spLocks noGrp="1"/>
+          </p:cNvSpPr>
+          <p:nvPr>
+            <p:ph type="sldNum" sz="quarter" idx="5"/>
+          </p:nvPr>
+        </p:nvSpPr>
+        <p:spPr/>
+        <p:txBody>
+          <a:bodyPr/>
+          <a:lstStyle/>
+          <a:p>
+            <a:fld id="{A9879B2A-7434-4C1D-9BE0-78F344C99C47}" type="slidenum">
+              <a:rPr kumimoji="1" lang="ja-JP" altLang="en-US" smtClean="0"/>
+              <a:t>5</a:t>
+            </a:fld>
+            <a:endParaRPr kumimoji="1" lang="ja-JP" altLang="en-US"/>
+          </a:p>
+        </p:txBody>
+      </p:sp>
+    </p:spTree>
+    <p:extLst>
+      <p:ext uri="{BB962C8B-B14F-4D97-AF65-F5344CB8AC3E}">
+        <p14:creationId xmlns:p14="http://schemas.microsoft.com/office/powerpoint/2010/main" val="3298293542"/>
+      </p:ext>
+    </p:extLst>
+  </p:cSld>
+  <p:clrMapOvr>
+    <a:masterClrMapping/>
+  </p:clrMapOvr>
+</p:notes>
 </file>
 
 <file path=ppt/slideLayouts/slideLayout1.xml><?xml version="1.0" encoding="utf-8"?>
@@ -147,15 +1085,18 @@
           </a:xfrm>
         </p:spPr>
         <p:txBody>
-          <a:bodyPr anchor="b"/>
+          <a:bodyPr anchor="ctr"/>
           <a:lstStyle>
             <a:lvl1pPr algn="ctr">
-              <a:defRPr sz="6000"/>
+              <a:defRPr sz="6000">
+                <a:latin typeface="ＭＳ Ｐゴシック" panose="020B0600070205080204" pitchFamily="50" charset="-128"/>
+                <a:ea typeface="ＭＳ Ｐゴシック" panose="020B0600070205080204" pitchFamily="50" charset="-128"/>
+              </a:defRPr>
             </a:lvl1pPr>
           </a:lstStyle>
           <a:p>
             <a:r>
-              <a:rPr kumimoji="1" lang="ja-JP" altLang="en-US"/>
+              <a:rPr kumimoji="1" lang="ja-JP" altLang="en-US" dirty="0"/>
               <a:t>マスター タイトルの書式設定</a:t>
             </a:r>
           </a:p>
@@ -188,7 +1129,10 @@
           <a:lstStyle>
             <a:lvl1pPr marL="0" indent="0" algn="ctr">
               <a:buNone/>
-              <a:defRPr sz="2400"/>
+              <a:defRPr sz="2400">
+                <a:latin typeface="ＭＳ Ｐゴシック" panose="020B0600070205080204" pitchFamily="50" charset="-128"/>
+                <a:ea typeface="ＭＳ Ｐゴシック" panose="020B0600070205080204" pitchFamily="50" charset="-128"/>
+              </a:defRPr>
             </a:lvl1pPr>
             <a:lvl2pPr marL="457200" indent="0" algn="ctr">
               <a:buNone/>
@@ -254,7 +1198,7 @@
           <a:p>
             <a:fld id="{79E2737C-7630-4B11-9487-992F9276E9B0}" type="datetimeFigureOut">
               <a:rPr kumimoji="1" lang="ja-JP" altLang="en-US" smtClean="0"/>
-              <a:t>2026/5/26</a:t>
+              <a:t>2026/6/4</a:t>
             </a:fld>
             <a:endParaRPr kumimoji="1" lang="ja-JP" altLang="en-US"/>
           </a:p>
@@ -484,7 +1428,7 @@
           <a:p>
             <a:fld id="{79E2737C-7630-4B11-9487-992F9276E9B0}" type="datetimeFigureOut">
               <a:rPr kumimoji="1" lang="ja-JP" altLang="en-US" smtClean="0"/>
-              <a:t>2026/5/26</a:t>
+              <a:t>2026/6/4</a:t>
             </a:fld>
             <a:endParaRPr kumimoji="1" lang="ja-JP" altLang="en-US"/>
           </a:p>
@@ -724,7 +1668,7 @@
           <a:p>
             <a:fld id="{79E2737C-7630-4B11-9487-992F9276E9B0}" type="datetimeFigureOut">
               <a:rPr kumimoji="1" lang="ja-JP" altLang="en-US" smtClean="0"/>
-              <a:t>2026/5/26</a:t>
+              <a:t>2026/6/4</a:t>
             </a:fld>
             <a:endParaRPr kumimoji="1" lang="ja-JP" altLang="en-US"/>
           </a:p>
@@ -833,7 +1777,14 @@
         <p:spPr/>
         <p:txBody>
           <a:bodyPr/>
-          <a:lstStyle/>
+          <a:lstStyle>
+            <a:lvl1pPr>
+              <a:defRPr>
+                <a:latin typeface="ＭＳ Ｐゴシック" panose="020B0600070205080204" pitchFamily="50" charset="-128"/>
+                <a:ea typeface="ＭＳ Ｐゴシック" panose="020B0600070205080204" pitchFamily="50" charset="-128"/>
+              </a:defRPr>
+            </a:lvl1pPr>
+          </a:lstStyle>
           <a:p>
             <a:r>
               <a:rPr kumimoji="1" lang="ja-JP" altLang="en-US"/>
@@ -861,71 +1812,102 @@
         <p:spPr/>
         <p:txBody>
           <a:bodyPr/>
-          <a:lstStyle/>
+          <a:lstStyle>
+            <a:lvl1pPr>
+              <a:defRPr>
+                <a:latin typeface="ＭＳ Ｐゴシック" panose="020B0600070205080204" pitchFamily="50" charset="-128"/>
+                <a:ea typeface="ＭＳ Ｐゴシック" panose="020B0600070205080204" pitchFamily="50" charset="-128"/>
+              </a:defRPr>
+            </a:lvl1pPr>
+            <a:lvl2pPr>
+              <a:defRPr>
+                <a:latin typeface="ＭＳ Ｐゴシック" panose="020B0600070205080204" pitchFamily="50" charset="-128"/>
+                <a:ea typeface="ＭＳ Ｐゴシック" panose="020B0600070205080204" pitchFamily="50" charset="-128"/>
+              </a:defRPr>
+            </a:lvl2pPr>
+            <a:lvl3pPr>
+              <a:defRPr sz="2400">
+                <a:latin typeface="ＭＳ Ｐゴシック" panose="020B0600070205080204" pitchFamily="50" charset="-128"/>
+                <a:ea typeface="ＭＳ Ｐゴシック" panose="020B0600070205080204" pitchFamily="50" charset="-128"/>
+              </a:defRPr>
+            </a:lvl3pPr>
+            <a:lvl4pPr>
+              <a:defRPr sz="2400">
+                <a:latin typeface="ＭＳ Ｐゴシック" panose="020B0600070205080204" pitchFamily="50" charset="-128"/>
+                <a:ea typeface="ＭＳ Ｐゴシック" panose="020B0600070205080204" pitchFamily="50" charset="-128"/>
+              </a:defRPr>
+            </a:lvl4pPr>
+            <a:lvl5pPr>
+              <a:defRPr sz="2400">
+                <a:latin typeface="ＭＳ Ｐゴシック" panose="020B0600070205080204" pitchFamily="50" charset="-128"/>
+                <a:ea typeface="ＭＳ Ｐゴシック" panose="020B0600070205080204" pitchFamily="50" charset="-128"/>
+              </a:defRPr>
+            </a:lvl5pPr>
+          </a:lstStyle>
           <a:p>
             <a:pPr lvl="0"/>
             <a:r>
-              <a:rPr kumimoji="1" lang="ja-JP" altLang="en-US"/>
+              <a:rPr kumimoji="1" lang="ja-JP" altLang="en-US" dirty="0"/>
               <a:t>マスター テキストの書式設定</a:t>
             </a:r>
           </a:p>
           <a:p>
             <a:pPr lvl="1"/>
             <a:r>
-              <a:rPr kumimoji="1" lang="ja-JP" altLang="en-US"/>
+              <a:rPr kumimoji="1" lang="ja-JP" altLang="en-US" dirty="0"/>
               <a:t>第 </a:t>
             </a:r>
             <a:r>
-              <a:rPr kumimoji="1" lang="en-US" altLang="ja-JP"/>
+              <a:rPr kumimoji="1" lang="en-US" altLang="ja-JP" dirty="0"/>
               <a:t>2 </a:t>
             </a:r>
             <a:r>
-              <a:rPr kumimoji="1" lang="ja-JP" altLang="en-US"/>
+              <a:rPr kumimoji="1" lang="ja-JP" altLang="en-US" dirty="0"/>
               <a:t>レベル</a:t>
             </a:r>
           </a:p>
           <a:p>
             <a:pPr lvl="2"/>
             <a:r>
-              <a:rPr kumimoji="1" lang="ja-JP" altLang="en-US"/>
+              <a:rPr kumimoji="1" lang="ja-JP" altLang="en-US" dirty="0"/>
               <a:t>第 </a:t>
             </a:r>
             <a:r>
-              <a:rPr kumimoji="1" lang="en-US" altLang="ja-JP"/>
+              <a:rPr kumimoji="1" lang="en-US" altLang="ja-JP" dirty="0"/>
               <a:t>3 </a:t>
             </a:r>
             <a:r>
-              <a:rPr kumimoji="1" lang="ja-JP" altLang="en-US"/>
+              <a:rPr kumimoji="1" lang="ja-JP" altLang="en-US" dirty="0"/>
               <a:t>レベル</a:t>
             </a:r>
           </a:p>
           <a:p>
             <a:pPr lvl="3"/>
             <a:r>
-              <a:rPr kumimoji="1" lang="ja-JP" altLang="en-US"/>
+              <a:rPr kumimoji="1" lang="ja-JP" altLang="en-US" dirty="0"/>
               <a:t>第 </a:t>
             </a:r>
             <a:r>
-              <a:rPr kumimoji="1" lang="en-US" altLang="ja-JP"/>
+              <a:rPr kumimoji="1" lang="en-US" altLang="ja-JP" dirty="0"/>
               <a:t>4 </a:t>
             </a:r>
             <a:r>
-              <a:rPr kumimoji="1" lang="ja-JP" altLang="en-US"/>
+              <a:rPr kumimoji="1" lang="ja-JP" altLang="en-US" dirty="0"/>
               <a:t>レベル</a:t>
             </a:r>
           </a:p>
           <a:p>
             <a:pPr lvl="4"/>
             <a:r>
-              <a:rPr kumimoji="1" lang="ja-JP" altLang="en-US"/>
+              <a:rPr kumimoji="1" lang="ja-JP" altLang="en-US" dirty="0"/>
               <a:t>第 </a:t>
             </a:r>
             <a:r>
-              <a:rPr kumimoji="1" lang="en-US" altLang="ja-JP"/>
+              <a:rPr kumimoji="1" lang="en-US" altLang="ja-JP" dirty="0"/>
               <a:t>5 </a:t>
             </a:r>
             <a:r>
-              <a:rPr kumimoji="1" lang="ja-JP" altLang="en-US"/>
+              <a:rPr kumimoji="1" lang="ja-JP" altLang="en-US" dirty="0"/>
               <a:t>レベル</a:t>
             </a:r>
           </a:p>
@@ -954,7 +1936,7 @@
           <a:p>
             <a:fld id="{79E2737C-7630-4B11-9487-992F9276E9B0}" type="datetimeFigureOut">
               <a:rPr kumimoji="1" lang="ja-JP" altLang="en-US" smtClean="0"/>
-              <a:t>2026/5/26</a:t>
+              <a:t>2026/6/4</a:t>
             </a:fld>
             <a:endParaRPr kumimoji="1" lang="ja-JP" altLang="en-US"/>
           </a:p>
@@ -1229,7 +2211,7 @@
           <a:p>
             <a:fld id="{79E2737C-7630-4B11-9487-992F9276E9B0}" type="datetimeFigureOut">
               <a:rPr kumimoji="1" lang="ja-JP" altLang="en-US" smtClean="0"/>
-              <a:t>2026/5/26</a:t>
+              <a:t>2026/6/4</a:t>
             </a:fld>
             <a:endParaRPr kumimoji="1" lang="ja-JP" altLang="en-US"/>
           </a:p>
@@ -1558,7 +2540,7 @@
           <a:p>
             <a:fld id="{79E2737C-7630-4B11-9487-992F9276E9B0}" type="datetimeFigureOut">
               <a:rPr kumimoji="1" lang="ja-JP" altLang="en-US" smtClean="0"/>
-              <a:t>2026/5/26</a:t>
+              <a:t>2026/6/4</a:t>
             </a:fld>
             <a:endParaRPr kumimoji="1" lang="ja-JP" altLang="en-US"/>
           </a:p>
@@ -2034,7 +3016,7 @@
           <a:p>
             <a:fld id="{79E2737C-7630-4B11-9487-992F9276E9B0}" type="datetimeFigureOut">
               <a:rPr kumimoji="1" lang="ja-JP" altLang="en-US" smtClean="0"/>
-              <a:t>2026/5/26</a:t>
+              <a:t>2026/6/4</a:t>
             </a:fld>
             <a:endParaRPr kumimoji="1" lang="ja-JP" altLang="en-US"/>
           </a:p>
@@ -2175,7 +3157,7 @@
           <a:p>
             <a:fld id="{79E2737C-7630-4B11-9487-992F9276E9B0}" type="datetimeFigureOut">
               <a:rPr kumimoji="1" lang="ja-JP" altLang="en-US" smtClean="0"/>
-              <a:t>2026/5/26</a:t>
+              <a:t>2026/6/4</a:t>
             </a:fld>
             <a:endParaRPr kumimoji="1" lang="ja-JP" altLang="en-US"/>
           </a:p>
@@ -2288,7 +3270,7 @@
           <a:p>
             <a:fld id="{79E2737C-7630-4B11-9487-992F9276E9B0}" type="datetimeFigureOut">
               <a:rPr kumimoji="1" lang="ja-JP" altLang="en-US" smtClean="0"/>
-              <a:t>2026/5/26</a:t>
+              <a:t>2026/6/4</a:t>
             </a:fld>
             <a:endParaRPr kumimoji="1" lang="ja-JP" altLang="en-US"/>
           </a:p>
@@ -2631,7 +3613,7 @@
           <a:p>
             <a:fld id="{79E2737C-7630-4B11-9487-992F9276E9B0}" type="datetimeFigureOut">
               <a:rPr kumimoji="1" lang="ja-JP" altLang="en-US" smtClean="0"/>
-              <a:t>2026/5/26</a:t>
+              <a:t>2026/6/4</a:t>
             </a:fld>
             <a:endParaRPr kumimoji="1" lang="ja-JP" altLang="en-US"/>
           </a:p>
@@ -2919,7 +3901,7 @@
           <a:p>
             <a:fld id="{79E2737C-7630-4B11-9487-992F9276E9B0}" type="datetimeFigureOut">
               <a:rPr kumimoji="1" lang="ja-JP" altLang="en-US" smtClean="0"/>
-              <a:t>2026/5/26</a:t>
+              <a:t>2026/6/4</a:t>
             </a:fld>
             <a:endParaRPr kumimoji="1" lang="ja-JP" altLang="en-US"/>
           </a:p>
@@ -3046,7 +4028,7 @@
           <a:lstStyle/>
           <a:p>
             <a:r>
-              <a:rPr kumimoji="1" lang="ja-JP" altLang="en-US"/>
+              <a:rPr kumimoji="1" lang="ja-JP" altLang="en-US" dirty="0"/>
               <a:t>マスター タイトルの書式設定</a:t>
             </a:r>
           </a:p>
@@ -3085,67 +4067,67 @@
           <a:p>
             <a:pPr lvl="0"/>
             <a:r>
-              <a:rPr kumimoji="1" lang="ja-JP" altLang="en-US"/>
+              <a:rPr kumimoji="1" lang="ja-JP" altLang="en-US" dirty="0"/>
               <a:t>マスター テキストの書式設定</a:t>
             </a:r>
           </a:p>
           <a:p>
             <a:pPr lvl="1"/>
             <a:r>
-              <a:rPr kumimoji="1" lang="ja-JP" altLang="en-US"/>
+              <a:rPr kumimoji="1" lang="ja-JP" altLang="en-US" dirty="0"/>
               <a:t>第 </a:t>
             </a:r>
             <a:r>
-              <a:rPr kumimoji="1" lang="en-US" altLang="ja-JP"/>
+              <a:rPr kumimoji="1" lang="en-US" altLang="ja-JP" dirty="0"/>
               <a:t>2 </a:t>
             </a:r>
             <a:r>
-              <a:rPr kumimoji="1" lang="ja-JP" altLang="en-US"/>
+              <a:rPr kumimoji="1" lang="ja-JP" altLang="en-US" dirty="0"/>
               <a:t>レベル</a:t>
             </a:r>
           </a:p>
           <a:p>
             <a:pPr lvl="2"/>
             <a:r>
-              <a:rPr kumimoji="1" lang="ja-JP" altLang="en-US"/>
+              <a:rPr kumimoji="1" lang="ja-JP" altLang="en-US" dirty="0"/>
               <a:t>第 </a:t>
             </a:r>
             <a:r>
-              <a:rPr kumimoji="1" lang="en-US" altLang="ja-JP"/>
+              <a:rPr kumimoji="1" lang="en-US" altLang="ja-JP" dirty="0"/>
               <a:t>3 </a:t>
             </a:r>
             <a:r>
-              <a:rPr kumimoji="1" lang="ja-JP" altLang="en-US"/>
+              <a:rPr kumimoji="1" lang="ja-JP" altLang="en-US" dirty="0"/>
               <a:t>レベル</a:t>
             </a:r>
           </a:p>
           <a:p>
             <a:pPr lvl="3"/>
             <a:r>
-              <a:rPr kumimoji="1" lang="ja-JP" altLang="en-US"/>
+              <a:rPr kumimoji="1" lang="ja-JP" altLang="en-US" dirty="0"/>
               <a:t>第 </a:t>
             </a:r>
             <a:r>
-              <a:rPr kumimoji="1" lang="en-US" altLang="ja-JP"/>
+              <a:rPr kumimoji="1" lang="en-US" altLang="ja-JP" dirty="0"/>
               <a:t>4 </a:t>
             </a:r>
             <a:r>
-              <a:rPr kumimoji="1" lang="ja-JP" altLang="en-US"/>
+              <a:rPr kumimoji="1" lang="ja-JP" altLang="en-US" dirty="0"/>
               <a:t>レベル</a:t>
             </a:r>
           </a:p>
           <a:p>
             <a:pPr lvl="4"/>
             <a:r>
-              <a:rPr kumimoji="1" lang="ja-JP" altLang="en-US"/>
+              <a:rPr kumimoji="1" lang="ja-JP" altLang="en-US" dirty="0"/>
               <a:t>第 </a:t>
             </a:r>
             <a:r>
-              <a:rPr kumimoji="1" lang="en-US" altLang="ja-JP"/>
+              <a:rPr kumimoji="1" lang="en-US" altLang="ja-JP" dirty="0"/>
               <a:t>5 </a:t>
             </a:r>
             <a:r>
-              <a:rPr kumimoji="1" lang="ja-JP" altLang="en-US"/>
+              <a:rPr kumimoji="1" lang="ja-JP" altLang="en-US" dirty="0"/>
               <a:t>レベル</a:t>
             </a:r>
           </a:p>
@@ -3192,7 +4174,7 @@
           <a:p>
             <a:fld id="{79E2737C-7630-4B11-9487-992F9276E9B0}" type="datetimeFigureOut">
               <a:rPr kumimoji="1" lang="ja-JP" altLang="en-US" smtClean="0"/>
-              <a:t>2026/5/26</a:t>
+              <a:t>2026/6/4</a:t>
             </a:fld>
             <a:endParaRPr kumimoji="1" lang="ja-JP" altLang="en-US"/>
           </a:p>
@@ -3302,7 +4284,7 @@
         </p:nvSpPr>
         <p:spPr>
           <a:xfrm>
-            <a:off x="-2693432" y="3162499"/>
+            <a:off x="-3651793" y="3347137"/>
             <a:ext cx="4439729" cy="4351338"/>
           </a:xfrm>
           <a:prstGeom prst="ellipse">
@@ -3356,7 +4338,7 @@
         </p:nvSpPr>
         <p:spPr>
           <a:xfrm>
-            <a:off x="-2005323" y="4317206"/>
+            <a:off x="-2963684" y="4501844"/>
             <a:ext cx="4439729" cy="4351338"/>
           </a:xfrm>
           <a:prstGeom prst="ellipse">
@@ -3539,8 +4521,8 @@
           <a:solidFill>
             <a:schemeClr val="tx1"/>
           </a:solidFill>
-          <a:latin typeface="ゴシック" panose="020B0609070205080204" pitchFamily="49" charset="-128"/>
-          <a:ea typeface="ゴシック" panose="020B0609070205080204" pitchFamily="49" charset="-128"/>
+          <a:latin typeface="ＭＳ Ｐゴシック" panose="020B0600070205080204" pitchFamily="50" charset="-128"/>
+          <a:ea typeface="ＭＳ Ｐゴシック" panose="020B0600070205080204" pitchFamily="50" charset="-128"/>
           <a:cs typeface="+mj-cs"/>
         </a:defRPr>
       </a:lvl1pPr>
@@ -3559,8 +4541,8 @@
           <a:solidFill>
             <a:schemeClr val="tx1"/>
           </a:solidFill>
-          <a:latin typeface="ゴシック" panose="020B0609070205080204" pitchFamily="49" charset="-128"/>
-          <a:ea typeface="ゴシック" panose="020B0609070205080204" pitchFamily="49" charset="-128"/>
+          <a:latin typeface="ＭＳ Ｐゴシック" panose="020B0600070205080204" pitchFamily="50" charset="-128"/>
+          <a:ea typeface="ＭＳ Ｐゴシック" panose="020B0600070205080204" pitchFamily="50" charset="-128"/>
           <a:cs typeface="+mn-cs"/>
         </a:defRPr>
       </a:lvl1pPr>
@@ -3577,8 +4559,8 @@
           <a:solidFill>
             <a:schemeClr val="tx1"/>
           </a:solidFill>
-          <a:latin typeface="ゴシック" panose="020B0609070205080204" pitchFamily="49" charset="-128"/>
-          <a:ea typeface="ゴシック" panose="020B0609070205080204" pitchFamily="49" charset="-128"/>
+          <a:latin typeface="ＭＳ Ｐゴシック" panose="020B0600070205080204" pitchFamily="50" charset="-128"/>
+          <a:ea typeface="ＭＳ Ｐゴシック" panose="020B0600070205080204" pitchFamily="50" charset="-128"/>
           <a:cs typeface="+mn-cs"/>
         </a:defRPr>
       </a:lvl2pPr>
@@ -3591,12 +4573,12 @@
         </a:spcBef>
         <a:buFont typeface="Arial" panose="020B0604020202020204" pitchFamily="34" charset="0"/>
         <a:buChar char="•"/>
-        <a:defRPr kumimoji="1" sz="2000" b="1" kern="1200">
+        <a:defRPr kumimoji="1" sz="2400" b="1" kern="1200">
           <a:solidFill>
             <a:schemeClr val="tx1"/>
           </a:solidFill>
-          <a:latin typeface="ゴシック" panose="020B0609070205080204" pitchFamily="49" charset="-128"/>
-          <a:ea typeface="ゴシック" panose="020B0609070205080204" pitchFamily="49" charset="-128"/>
+          <a:latin typeface="ＭＳ Ｐゴシック" panose="020B0600070205080204" pitchFamily="50" charset="-128"/>
+          <a:ea typeface="ＭＳ Ｐゴシック" panose="020B0600070205080204" pitchFamily="50" charset="-128"/>
           <a:cs typeface="+mn-cs"/>
         </a:defRPr>
       </a:lvl3pPr>
@@ -3609,12 +4591,12 @@
         </a:spcBef>
         <a:buFont typeface="Arial" panose="020B0604020202020204" pitchFamily="34" charset="0"/>
         <a:buChar char="•"/>
-        <a:defRPr kumimoji="1" sz="1800" b="1" kern="1200">
+        <a:defRPr kumimoji="1" sz="2400" b="1" kern="1200">
           <a:solidFill>
             <a:schemeClr val="tx1"/>
           </a:solidFill>
-          <a:latin typeface="ゴシック" panose="020B0609070205080204" pitchFamily="49" charset="-128"/>
-          <a:ea typeface="ゴシック" panose="020B0609070205080204" pitchFamily="49" charset="-128"/>
+          <a:latin typeface="ＭＳ Ｐゴシック" panose="020B0600070205080204" pitchFamily="50" charset="-128"/>
+          <a:ea typeface="ＭＳ Ｐゴシック" panose="020B0600070205080204" pitchFamily="50" charset="-128"/>
           <a:cs typeface="+mn-cs"/>
         </a:defRPr>
       </a:lvl4pPr>
@@ -3627,12 +4609,12 @@
         </a:spcBef>
         <a:buFont typeface="Arial" panose="020B0604020202020204" pitchFamily="34" charset="0"/>
         <a:buChar char="•"/>
-        <a:defRPr kumimoji="1" sz="1800" b="1" kern="1200">
+        <a:defRPr kumimoji="1" sz="2400" b="1" kern="1200">
           <a:solidFill>
             <a:schemeClr val="tx1"/>
           </a:solidFill>
-          <a:latin typeface="ゴシック" panose="020B0609070205080204" pitchFamily="49" charset="-128"/>
-          <a:ea typeface="ゴシック" panose="020B0609070205080204" pitchFamily="49" charset="-128"/>
+          <a:latin typeface="ＭＳ Ｐゴシック" panose="020B0600070205080204" pitchFamily="50" charset="-128"/>
+          <a:ea typeface="ＭＳ Ｐゴシック" panose="020B0600070205080204" pitchFamily="50" charset="-128"/>
           <a:cs typeface="+mn-cs"/>
         </a:defRPr>
       </a:lvl5pPr>
@@ -3846,7 +4828,11 @@
           <a:bodyPr/>
           <a:lstStyle/>
           <a:p>
-            <a:endParaRPr kumimoji="1" lang="ja-JP" altLang="en-US"/>
+            <a:r>
+              <a:rPr kumimoji="1" lang="en-US" altLang="ja-JP" dirty="0" err="1"/>
+              <a:t>AsuLink</a:t>
+            </a:r>
+            <a:endParaRPr kumimoji="1" lang="ja-JP" altLang="en-US" dirty="0"/>
           </a:p>
         </p:txBody>
       </p:sp>
@@ -3871,7 +4857,7 @@
           <a:bodyPr/>
           <a:lstStyle/>
           <a:p>
-            <a:endParaRPr kumimoji="1" lang="ja-JP" altLang="en-US"/>
+            <a:endParaRPr kumimoji="1" lang="ja-JP" altLang="en-US" dirty="0"/>
           </a:p>
         </p:txBody>
       </p:sp>
@@ -3879,6 +4865,900 @@
     <p:extLst>
       <p:ext uri="{BB962C8B-B14F-4D97-AF65-F5344CB8AC3E}">
         <p14:creationId xmlns:p14="http://schemas.microsoft.com/office/powerpoint/2010/main" val="2751436818"/>
+      </p:ext>
+    </p:extLst>
+  </p:cSld>
+  <p:clrMapOvr>
+    <a:masterClrMapping/>
+  </p:clrMapOvr>
+</p:sld>
+</file>
+
+<file path=ppt/slides/slide2.xml><?xml version="1.0" encoding="utf-8"?>
+<p:sld xmlns:a="http://schemas.openxmlformats.org/drawingml/2006/main" xmlns:r="http://schemas.openxmlformats.org/officeDocument/2006/relationships" xmlns:p="http://schemas.openxmlformats.org/presentationml/2006/main">
+  <p:cSld>
+    <p:spTree>
+      <p:nvGrpSpPr>
+        <p:cNvPr id="1" name=""/>
+        <p:cNvGrpSpPr/>
+        <p:nvPr/>
+      </p:nvGrpSpPr>
+      <p:grpSpPr>
+        <a:xfrm>
+          <a:off x="0" y="0"/>
+          <a:ext cx="0" cy="0"/>
+          <a:chOff x="0" y="0"/>
+          <a:chExt cx="0" cy="0"/>
+        </a:xfrm>
+      </p:grpSpPr>
+      <p:sp>
+        <p:nvSpPr>
+          <p:cNvPr id="2" name="タイトル 1">
+            <a:extLst>
+              <a:ext uri="{FF2B5EF4-FFF2-40B4-BE49-F238E27FC236}">
+                <a16:creationId xmlns:a16="http://schemas.microsoft.com/office/drawing/2014/main" id="{8F820CFE-EA7B-8BC8-71F2-759459DA4E5A}"/>
+              </a:ext>
+            </a:extLst>
+          </p:cNvPr>
+          <p:cNvSpPr>
+            <a:spLocks noGrp="1"/>
+          </p:cNvSpPr>
+          <p:nvPr>
+            <p:ph type="title"/>
+          </p:nvPr>
+        </p:nvSpPr>
+        <p:spPr/>
+        <p:txBody>
+          <a:bodyPr/>
+          <a:lstStyle/>
+          <a:p>
+            <a:r>
+              <a:rPr kumimoji="1" lang="ja-JP" altLang="en-US" dirty="0"/>
+              <a:t>今の社会</a:t>
+            </a:r>
+          </a:p>
+        </p:txBody>
+      </p:sp>
+      <p:sp>
+        <p:nvSpPr>
+          <p:cNvPr id="3" name="コンテンツ プレースホルダー 2">
+            <a:extLst>
+              <a:ext uri="{FF2B5EF4-FFF2-40B4-BE49-F238E27FC236}">
+                <a16:creationId xmlns:a16="http://schemas.microsoft.com/office/drawing/2014/main" id="{74ADE760-6C54-6743-723C-019EE47BF227}"/>
+              </a:ext>
+            </a:extLst>
+          </p:cNvPr>
+          <p:cNvSpPr>
+            <a:spLocks noGrp="1"/>
+          </p:cNvSpPr>
+          <p:nvPr>
+            <p:ph idx="1"/>
+          </p:nvPr>
+        </p:nvSpPr>
+        <p:spPr>
+          <a:xfrm>
+            <a:off x="838200" y="1825625"/>
+            <a:ext cx="10515600" cy="1489075"/>
+          </a:xfrm>
+        </p:spPr>
+        <p:txBody>
+          <a:bodyPr/>
+          <a:lstStyle/>
+          <a:p>
+            <a:r>
+              <a:rPr lang="ja-JP" altLang="en-US" dirty="0"/>
+              <a:t>人と人との距離を</a:t>
+            </a:r>
+            <a:r>
+              <a:rPr lang="en-US" altLang="ja-JP" dirty="0"/>
+              <a:t>”</a:t>
+            </a:r>
+            <a:r>
+              <a:rPr lang="ja-JP" altLang="en-US" dirty="0"/>
+              <a:t>繋がり方</a:t>
+            </a:r>
+            <a:r>
+              <a:rPr lang="en-US" altLang="ja-JP" dirty="0"/>
+              <a:t>”</a:t>
+            </a:r>
+            <a:r>
+              <a:rPr lang="ja-JP" altLang="en-US" dirty="0"/>
+              <a:t>で決める社会</a:t>
+            </a:r>
+            <a:endParaRPr lang="en-US" altLang="ja-JP" dirty="0"/>
+          </a:p>
+          <a:p>
+            <a:r>
+              <a:rPr kumimoji="1" lang="ja-JP" altLang="en-US" dirty="0"/>
+              <a:t>スマホの普及によって、遠くの人とでも繋がれる</a:t>
+            </a:r>
+            <a:br>
+              <a:rPr kumimoji="1" lang="en-US" altLang="ja-JP" dirty="0"/>
+            </a:br>
+            <a:r>
+              <a:rPr kumimoji="1" lang="en-US" altLang="ja-JP" dirty="0"/>
+              <a:t>SNS</a:t>
+            </a:r>
+            <a:r>
+              <a:rPr kumimoji="1" lang="ja-JP" altLang="en-US" dirty="0"/>
+              <a:t>はその一例</a:t>
+            </a:r>
+            <a:endParaRPr kumimoji="1" lang="en-US" altLang="ja-JP" dirty="0"/>
+          </a:p>
+        </p:txBody>
+      </p:sp>
+      <p:sp>
+        <p:nvSpPr>
+          <p:cNvPr id="5" name="コンテンツ プレースホルダー 2">
+            <a:extLst>
+              <a:ext uri="{FF2B5EF4-FFF2-40B4-BE49-F238E27FC236}">
+                <a16:creationId xmlns:a16="http://schemas.microsoft.com/office/drawing/2014/main" id="{51005ACF-9962-84E6-C663-CF3D1BA2A07C}"/>
+              </a:ext>
+            </a:extLst>
+          </p:cNvPr>
+          <p:cNvSpPr txBox="1">
+            <a:spLocks/>
+          </p:cNvSpPr>
+          <p:nvPr/>
+        </p:nvSpPr>
+        <p:spPr>
+          <a:xfrm>
+            <a:off x="1155700" y="3416301"/>
+            <a:ext cx="9664700" cy="2192019"/>
+          </a:xfrm>
+          <a:prstGeom prst="rect">
+            <a:avLst/>
+          </a:prstGeom>
+        </p:spPr>
+        <p:txBody>
+          <a:bodyPr vert="horz" lIns="91440" tIns="45720" rIns="91440" bIns="45720" rtlCol="0">
+            <a:normAutofit/>
+          </a:bodyPr>
+          <a:lstStyle>
+            <a:lvl1pPr marL="228600" indent="-228600" algn="l" defTabSz="914400" rtl="0" eaLnBrk="1" latinLnBrk="0" hangingPunct="1">
+              <a:lnSpc>
+                <a:spcPct val="90000"/>
+              </a:lnSpc>
+              <a:spcBef>
+                <a:spcPts val="1000"/>
+              </a:spcBef>
+              <a:buFont typeface="Arial" panose="020B0604020202020204" pitchFamily="34" charset="0"/>
+              <a:buChar char="•"/>
+              <a:defRPr kumimoji="1" sz="2800" b="1" kern="1200">
+                <a:solidFill>
+                  <a:schemeClr val="tx1"/>
+                </a:solidFill>
+                <a:latin typeface="ＭＳ Ｐゴシック" panose="020B0600070205080204" pitchFamily="50" charset="-128"/>
+                <a:ea typeface="ＭＳ Ｐゴシック" panose="020B0600070205080204" pitchFamily="50" charset="-128"/>
+                <a:cs typeface="+mn-cs"/>
+              </a:defRPr>
+            </a:lvl1pPr>
+            <a:lvl2pPr marL="685800" indent="-228600" algn="l" defTabSz="914400" rtl="0" eaLnBrk="1" latinLnBrk="0" hangingPunct="1">
+              <a:lnSpc>
+                <a:spcPct val="90000"/>
+              </a:lnSpc>
+              <a:spcBef>
+                <a:spcPts val="500"/>
+              </a:spcBef>
+              <a:buFont typeface="Arial" panose="020B0604020202020204" pitchFamily="34" charset="0"/>
+              <a:buChar char="•"/>
+              <a:defRPr kumimoji="1" sz="2400" b="1" kern="1200">
+                <a:solidFill>
+                  <a:schemeClr val="tx1"/>
+                </a:solidFill>
+                <a:latin typeface="ＭＳ Ｐゴシック" panose="020B0600070205080204" pitchFamily="50" charset="-128"/>
+                <a:ea typeface="ＭＳ Ｐゴシック" panose="020B0600070205080204" pitchFamily="50" charset="-128"/>
+                <a:cs typeface="+mn-cs"/>
+              </a:defRPr>
+            </a:lvl2pPr>
+            <a:lvl3pPr marL="1143000" indent="-228600" algn="l" defTabSz="914400" rtl="0" eaLnBrk="1" latinLnBrk="0" hangingPunct="1">
+              <a:lnSpc>
+                <a:spcPct val="90000"/>
+              </a:lnSpc>
+              <a:spcBef>
+                <a:spcPts val="500"/>
+              </a:spcBef>
+              <a:buFont typeface="Arial" panose="020B0604020202020204" pitchFamily="34" charset="0"/>
+              <a:buChar char="•"/>
+              <a:defRPr kumimoji="1" sz="2400" b="1" kern="1200">
+                <a:solidFill>
+                  <a:schemeClr val="tx1"/>
+                </a:solidFill>
+                <a:latin typeface="ＭＳ Ｐゴシック" panose="020B0600070205080204" pitchFamily="50" charset="-128"/>
+                <a:ea typeface="ＭＳ Ｐゴシック" panose="020B0600070205080204" pitchFamily="50" charset="-128"/>
+                <a:cs typeface="+mn-cs"/>
+              </a:defRPr>
+            </a:lvl3pPr>
+            <a:lvl4pPr marL="1600200" indent="-228600" algn="l" defTabSz="914400" rtl="0" eaLnBrk="1" latinLnBrk="0" hangingPunct="1">
+              <a:lnSpc>
+                <a:spcPct val="90000"/>
+              </a:lnSpc>
+              <a:spcBef>
+                <a:spcPts val="500"/>
+              </a:spcBef>
+              <a:buFont typeface="Arial" panose="020B0604020202020204" pitchFamily="34" charset="0"/>
+              <a:buChar char="•"/>
+              <a:defRPr kumimoji="1" sz="2400" b="1" kern="1200">
+                <a:solidFill>
+                  <a:schemeClr val="tx1"/>
+                </a:solidFill>
+                <a:latin typeface="ＭＳ Ｐゴシック" panose="020B0600070205080204" pitchFamily="50" charset="-128"/>
+                <a:ea typeface="ＭＳ Ｐゴシック" panose="020B0600070205080204" pitchFamily="50" charset="-128"/>
+                <a:cs typeface="+mn-cs"/>
+              </a:defRPr>
+            </a:lvl4pPr>
+            <a:lvl5pPr marL="2057400" indent="-228600" algn="l" defTabSz="914400" rtl="0" eaLnBrk="1" latinLnBrk="0" hangingPunct="1">
+              <a:lnSpc>
+                <a:spcPct val="90000"/>
+              </a:lnSpc>
+              <a:spcBef>
+                <a:spcPts val="500"/>
+              </a:spcBef>
+              <a:buFont typeface="Arial" panose="020B0604020202020204" pitchFamily="34" charset="0"/>
+              <a:buChar char="•"/>
+              <a:defRPr kumimoji="1" sz="2400" b="1" kern="1200">
+                <a:solidFill>
+                  <a:schemeClr val="tx1"/>
+                </a:solidFill>
+                <a:latin typeface="ＭＳ Ｐゴシック" panose="020B0600070205080204" pitchFamily="50" charset="-128"/>
+                <a:ea typeface="ＭＳ Ｐゴシック" panose="020B0600070205080204" pitchFamily="50" charset="-128"/>
+                <a:cs typeface="+mn-cs"/>
+              </a:defRPr>
+            </a:lvl5pPr>
+            <a:lvl6pPr marL="2514600" indent="-228600" algn="l" defTabSz="914400" rtl="0" eaLnBrk="1" latinLnBrk="0" hangingPunct="1">
+              <a:lnSpc>
+                <a:spcPct val="90000"/>
+              </a:lnSpc>
+              <a:spcBef>
+                <a:spcPts val="500"/>
+              </a:spcBef>
+              <a:buFont typeface="Arial" panose="020B0604020202020204" pitchFamily="34" charset="0"/>
+              <a:buChar char="•"/>
+              <a:defRPr kumimoji="1" sz="1800" kern="1200">
+                <a:solidFill>
+                  <a:schemeClr val="tx1"/>
+                </a:solidFill>
+                <a:latin typeface="+mn-lt"/>
+                <a:ea typeface="+mn-ea"/>
+                <a:cs typeface="+mn-cs"/>
+              </a:defRPr>
+            </a:lvl6pPr>
+            <a:lvl7pPr marL="2971800" indent="-228600" algn="l" defTabSz="914400" rtl="0" eaLnBrk="1" latinLnBrk="0" hangingPunct="1">
+              <a:lnSpc>
+                <a:spcPct val="90000"/>
+              </a:lnSpc>
+              <a:spcBef>
+                <a:spcPts val="500"/>
+              </a:spcBef>
+              <a:buFont typeface="Arial" panose="020B0604020202020204" pitchFamily="34" charset="0"/>
+              <a:buChar char="•"/>
+              <a:defRPr kumimoji="1" sz="1800" kern="1200">
+                <a:solidFill>
+                  <a:schemeClr val="tx1"/>
+                </a:solidFill>
+                <a:latin typeface="+mn-lt"/>
+                <a:ea typeface="+mn-ea"/>
+                <a:cs typeface="+mn-cs"/>
+              </a:defRPr>
+            </a:lvl7pPr>
+            <a:lvl8pPr marL="3429000" indent="-228600" algn="l" defTabSz="914400" rtl="0" eaLnBrk="1" latinLnBrk="0" hangingPunct="1">
+              <a:lnSpc>
+                <a:spcPct val="90000"/>
+              </a:lnSpc>
+              <a:spcBef>
+                <a:spcPts val="500"/>
+              </a:spcBef>
+              <a:buFont typeface="Arial" panose="020B0604020202020204" pitchFamily="34" charset="0"/>
+              <a:buChar char="•"/>
+              <a:defRPr kumimoji="1" sz="1800" kern="1200">
+                <a:solidFill>
+                  <a:schemeClr val="tx1"/>
+                </a:solidFill>
+                <a:latin typeface="+mn-lt"/>
+                <a:ea typeface="+mn-ea"/>
+                <a:cs typeface="+mn-cs"/>
+              </a:defRPr>
+            </a:lvl8pPr>
+            <a:lvl9pPr marL="3886200" indent="-228600" algn="l" defTabSz="914400" rtl="0" eaLnBrk="1" latinLnBrk="0" hangingPunct="1">
+              <a:lnSpc>
+                <a:spcPct val="90000"/>
+              </a:lnSpc>
+              <a:spcBef>
+                <a:spcPts val="500"/>
+              </a:spcBef>
+              <a:buFont typeface="Arial" panose="020B0604020202020204" pitchFamily="34" charset="0"/>
+              <a:buChar char="•"/>
+              <a:defRPr kumimoji="1" sz="1800" kern="1200">
+                <a:solidFill>
+                  <a:schemeClr val="tx1"/>
+                </a:solidFill>
+                <a:latin typeface="+mn-lt"/>
+                <a:ea typeface="+mn-ea"/>
+                <a:cs typeface="+mn-cs"/>
+              </a:defRPr>
+            </a:lvl9pPr>
+          </a:lstStyle>
+          <a:p>
+            <a:pPr marL="0" indent="0">
+              <a:buNone/>
+            </a:pPr>
+            <a:r>
+              <a:rPr lang="ja-JP" altLang="en-US" dirty="0"/>
+              <a:t>人と人との距離は縮まっている？</a:t>
+            </a:r>
+            <a:endParaRPr lang="en-US" altLang="ja-JP" dirty="0"/>
+          </a:p>
+          <a:p>
+            <a:pPr marL="0" indent="0">
+              <a:buNone/>
+            </a:pPr>
+            <a:endParaRPr lang="en-US" altLang="ja-JP" dirty="0"/>
+          </a:p>
+          <a:p>
+            <a:pPr marL="0" indent="0">
+              <a:buNone/>
+            </a:pPr>
+            <a:r>
+              <a:rPr lang="ja-JP" altLang="en-US" dirty="0"/>
+              <a:t>文字だけの機械的なやりとり</a:t>
+            </a:r>
+            <a:endParaRPr lang="en-US" altLang="ja-JP" dirty="0"/>
+          </a:p>
+          <a:p>
+            <a:pPr marL="0" indent="0">
+              <a:buNone/>
+            </a:pPr>
+            <a:r>
+              <a:rPr lang="ja-JP" altLang="en-US" dirty="0"/>
+              <a:t>⇒心の距離は本当に縮まっているのだろうか？</a:t>
+            </a:r>
+            <a:endParaRPr lang="en-US" altLang="ja-JP" dirty="0"/>
+          </a:p>
+        </p:txBody>
+      </p:sp>
+    </p:spTree>
+    <p:extLst>
+      <p:ext uri="{BB962C8B-B14F-4D97-AF65-F5344CB8AC3E}">
+        <p14:creationId xmlns:p14="http://schemas.microsoft.com/office/powerpoint/2010/main" val="1756085709"/>
+      </p:ext>
+    </p:extLst>
+  </p:cSld>
+  <p:clrMapOvr>
+    <a:masterClrMapping/>
+  </p:clrMapOvr>
+</p:sld>
+</file>
+
+<file path=ppt/slides/slide3.xml><?xml version="1.0" encoding="utf-8"?>
+<p:sld xmlns:a="http://schemas.openxmlformats.org/drawingml/2006/main" xmlns:r="http://schemas.openxmlformats.org/officeDocument/2006/relationships" xmlns:p="http://schemas.openxmlformats.org/presentationml/2006/main">
+  <p:cSld>
+    <p:spTree>
+      <p:nvGrpSpPr>
+        <p:cNvPr id="1" name=""/>
+        <p:cNvGrpSpPr/>
+        <p:nvPr/>
+      </p:nvGrpSpPr>
+      <p:grpSpPr>
+        <a:xfrm>
+          <a:off x="0" y="0"/>
+          <a:ext cx="0" cy="0"/>
+          <a:chOff x="0" y="0"/>
+          <a:chExt cx="0" cy="0"/>
+        </a:xfrm>
+      </p:grpSpPr>
+      <p:sp>
+        <p:nvSpPr>
+          <p:cNvPr id="2" name="タイトル 1">
+            <a:extLst>
+              <a:ext uri="{FF2B5EF4-FFF2-40B4-BE49-F238E27FC236}">
+                <a16:creationId xmlns:a16="http://schemas.microsoft.com/office/drawing/2014/main" id="{2CCDE4FB-1350-3F05-8BCE-092565D4460B}"/>
+              </a:ext>
+            </a:extLst>
+          </p:cNvPr>
+          <p:cNvSpPr>
+            <a:spLocks noGrp="1"/>
+          </p:cNvSpPr>
+          <p:nvPr>
+            <p:ph type="title"/>
+          </p:nvPr>
+        </p:nvSpPr>
+        <p:spPr/>
+        <p:txBody>
+          <a:bodyPr/>
+          <a:lstStyle/>
+          <a:p>
+            <a:r>
+              <a:rPr kumimoji="1" lang="ja-JP" altLang="en-US" dirty="0"/>
+              <a:t>家族との</a:t>
+            </a:r>
+            <a:r>
+              <a:rPr lang="ja-JP" altLang="en-US" dirty="0"/>
+              <a:t>つながり</a:t>
+            </a:r>
+            <a:endParaRPr kumimoji="1" lang="ja-JP" altLang="en-US" dirty="0"/>
+          </a:p>
+        </p:txBody>
+      </p:sp>
+      <p:sp>
+        <p:nvSpPr>
+          <p:cNvPr id="3" name="コンテンツ プレースホルダー 2">
+            <a:extLst>
+              <a:ext uri="{FF2B5EF4-FFF2-40B4-BE49-F238E27FC236}">
+                <a16:creationId xmlns:a16="http://schemas.microsoft.com/office/drawing/2014/main" id="{B1D44027-2504-39A4-5232-2BE73CA089FA}"/>
+              </a:ext>
+            </a:extLst>
+          </p:cNvPr>
+          <p:cNvSpPr>
+            <a:spLocks noGrp="1"/>
+          </p:cNvSpPr>
+          <p:nvPr>
+            <p:ph idx="1"/>
+          </p:nvPr>
+        </p:nvSpPr>
+        <p:spPr/>
+        <p:txBody>
+          <a:bodyPr/>
+          <a:lstStyle/>
+          <a:p>
+            <a:endParaRPr kumimoji="1" lang="ja-JP" altLang="en-US"/>
+          </a:p>
+        </p:txBody>
+      </p:sp>
+    </p:spTree>
+    <p:extLst>
+      <p:ext uri="{BB962C8B-B14F-4D97-AF65-F5344CB8AC3E}">
+        <p14:creationId xmlns:p14="http://schemas.microsoft.com/office/powerpoint/2010/main" val="3445402463"/>
+      </p:ext>
+    </p:extLst>
+  </p:cSld>
+  <p:clrMapOvr>
+    <a:masterClrMapping/>
+  </p:clrMapOvr>
+</p:sld>
+</file>
+
+<file path=ppt/slides/slide4.xml><?xml version="1.0" encoding="utf-8"?>
+<p:sld xmlns:a="http://schemas.openxmlformats.org/drawingml/2006/main" xmlns:r="http://schemas.openxmlformats.org/officeDocument/2006/relationships" xmlns:p="http://schemas.openxmlformats.org/presentationml/2006/main">
+  <p:cSld>
+    <p:spTree>
+      <p:nvGrpSpPr>
+        <p:cNvPr id="1" name=""/>
+        <p:cNvGrpSpPr/>
+        <p:nvPr/>
+      </p:nvGrpSpPr>
+      <p:grpSpPr>
+        <a:xfrm>
+          <a:off x="0" y="0"/>
+          <a:ext cx="0" cy="0"/>
+          <a:chOff x="0" y="0"/>
+          <a:chExt cx="0" cy="0"/>
+        </a:xfrm>
+      </p:grpSpPr>
+      <p:sp>
+        <p:nvSpPr>
+          <p:cNvPr id="2" name="タイトル 1">
+            <a:extLst>
+              <a:ext uri="{FF2B5EF4-FFF2-40B4-BE49-F238E27FC236}">
+                <a16:creationId xmlns:a16="http://schemas.microsoft.com/office/drawing/2014/main" id="{802AD17B-87F9-AA18-3176-EBA49E7A8A5E}"/>
+              </a:ext>
+            </a:extLst>
+          </p:cNvPr>
+          <p:cNvSpPr>
+            <a:spLocks noGrp="1"/>
+          </p:cNvSpPr>
+          <p:nvPr>
+            <p:ph type="title"/>
+          </p:nvPr>
+        </p:nvSpPr>
+        <p:spPr/>
+        <p:txBody>
+          <a:bodyPr/>
+          <a:lstStyle/>
+          <a:p>
+            <a:r>
+              <a:rPr kumimoji="1" lang="ja-JP" altLang="en-US" dirty="0"/>
+              <a:t>アルバムについて</a:t>
+            </a:r>
+          </a:p>
+        </p:txBody>
+      </p:sp>
+      <p:sp>
+        <p:nvSpPr>
+          <p:cNvPr id="3" name="コンテンツ プレースホルダー 2">
+            <a:extLst>
+              <a:ext uri="{FF2B5EF4-FFF2-40B4-BE49-F238E27FC236}">
+                <a16:creationId xmlns:a16="http://schemas.microsoft.com/office/drawing/2014/main" id="{0996FA27-8198-BA9D-7F41-E6811ADF7B9D}"/>
+              </a:ext>
+            </a:extLst>
+          </p:cNvPr>
+          <p:cNvSpPr>
+            <a:spLocks noGrp="1"/>
+          </p:cNvSpPr>
+          <p:nvPr>
+            <p:ph idx="1"/>
+          </p:nvPr>
+        </p:nvSpPr>
+        <p:spPr/>
+        <p:txBody>
+          <a:bodyPr/>
+          <a:lstStyle/>
+          <a:p>
+            <a:endParaRPr kumimoji="1" lang="ja-JP" altLang="en-US"/>
+          </a:p>
+        </p:txBody>
+      </p:sp>
+    </p:spTree>
+    <p:extLst>
+      <p:ext uri="{BB962C8B-B14F-4D97-AF65-F5344CB8AC3E}">
+        <p14:creationId xmlns:p14="http://schemas.microsoft.com/office/powerpoint/2010/main" val="1951016937"/>
+      </p:ext>
+    </p:extLst>
+  </p:cSld>
+  <p:clrMapOvr>
+    <a:masterClrMapping/>
+  </p:clrMapOvr>
+</p:sld>
+</file>
+
+<file path=ppt/slides/slide5.xml><?xml version="1.0" encoding="utf-8"?>
+<p:sld xmlns:a="http://schemas.openxmlformats.org/drawingml/2006/main" xmlns:r="http://schemas.openxmlformats.org/officeDocument/2006/relationships" xmlns:p="http://schemas.openxmlformats.org/presentationml/2006/main">
+  <p:cSld>
+    <p:spTree>
+      <p:nvGrpSpPr>
+        <p:cNvPr id="1" name=""/>
+        <p:cNvGrpSpPr/>
+        <p:nvPr/>
+      </p:nvGrpSpPr>
+      <p:grpSpPr>
+        <a:xfrm>
+          <a:off x="0" y="0"/>
+          <a:ext cx="0" cy="0"/>
+          <a:chOff x="0" y="0"/>
+          <a:chExt cx="0" cy="0"/>
+        </a:xfrm>
+      </p:grpSpPr>
+      <p:sp>
+        <p:nvSpPr>
+          <p:cNvPr id="2" name="タイトル 1">
+            <a:extLst>
+              <a:ext uri="{FF2B5EF4-FFF2-40B4-BE49-F238E27FC236}">
+                <a16:creationId xmlns:a16="http://schemas.microsoft.com/office/drawing/2014/main" id="{3A6BC4A6-1444-2EBA-FD7E-2EB23DC5FA50}"/>
+              </a:ext>
+            </a:extLst>
+          </p:cNvPr>
+          <p:cNvSpPr>
+            <a:spLocks noGrp="1"/>
+          </p:cNvSpPr>
+          <p:nvPr>
+            <p:ph type="title"/>
+          </p:nvPr>
+        </p:nvSpPr>
+        <p:spPr/>
+        <p:txBody>
+          <a:bodyPr/>
+          <a:lstStyle/>
+          <a:p>
+            <a:r>
+              <a:rPr kumimoji="1" lang="ja-JP" altLang="en-US" dirty="0"/>
+              <a:t>提案する、主題</a:t>
+            </a:r>
+          </a:p>
+        </p:txBody>
+      </p:sp>
+      <p:sp>
+        <p:nvSpPr>
+          <p:cNvPr id="3" name="コンテンツ プレースホルダー 2">
+            <a:extLst>
+              <a:ext uri="{FF2B5EF4-FFF2-40B4-BE49-F238E27FC236}">
+                <a16:creationId xmlns:a16="http://schemas.microsoft.com/office/drawing/2014/main" id="{749E78AE-35ED-ABC5-D840-B202B17D4757}"/>
+              </a:ext>
+            </a:extLst>
+          </p:cNvPr>
+          <p:cNvSpPr>
+            <a:spLocks noGrp="1"/>
+          </p:cNvSpPr>
+          <p:nvPr>
+            <p:ph idx="1"/>
+          </p:nvPr>
+        </p:nvSpPr>
+        <p:spPr/>
+        <p:txBody>
+          <a:bodyPr/>
+          <a:lstStyle/>
+          <a:p>
+            <a:endParaRPr kumimoji="1" lang="ja-JP" altLang="en-US"/>
+          </a:p>
+        </p:txBody>
+      </p:sp>
+    </p:spTree>
+    <p:extLst>
+      <p:ext uri="{BB962C8B-B14F-4D97-AF65-F5344CB8AC3E}">
+        <p14:creationId xmlns:p14="http://schemas.microsoft.com/office/powerpoint/2010/main" val="842328099"/>
+      </p:ext>
+    </p:extLst>
+  </p:cSld>
+  <p:clrMapOvr>
+    <a:masterClrMapping/>
+  </p:clrMapOvr>
+</p:sld>
+</file>
+
+<file path=ppt/slides/slide6.xml><?xml version="1.0" encoding="utf-8"?>
+<p:sld xmlns:a="http://schemas.openxmlformats.org/drawingml/2006/main" xmlns:r="http://schemas.openxmlformats.org/officeDocument/2006/relationships" xmlns:p="http://schemas.openxmlformats.org/presentationml/2006/main">
+  <p:cSld>
+    <p:spTree>
+      <p:nvGrpSpPr>
+        <p:cNvPr id="1" name=""/>
+        <p:cNvGrpSpPr/>
+        <p:nvPr/>
+      </p:nvGrpSpPr>
+      <p:grpSpPr>
+        <a:xfrm>
+          <a:off x="0" y="0"/>
+          <a:ext cx="0" cy="0"/>
+          <a:chOff x="0" y="0"/>
+          <a:chExt cx="0" cy="0"/>
+        </a:xfrm>
+      </p:grpSpPr>
+      <p:sp>
+        <p:nvSpPr>
+          <p:cNvPr id="2" name="タイトル 1">
+            <a:extLst>
+              <a:ext uri="{FF2B5EF4-FFF2-40B4-BE49-F238E27FC236}">
+                <a16:creationId xmlns:a16="http://schemas.microsoft.com/office/drawing/2014/main" id="{4149A09B-2A0C-9046-8D43-3E3AB4C73C6A}"/>
+              </a:ext>
+            </a:extLst>
+          </p:cNvPr>
+          <p:cNvSpPr>
+            <a:spLocks noGrp="1"/>
+          </p:cNvSpPr>
+          <p:nvPr>
+            <p:ph type="title"/>
+          </p:nvPr>
+        </p:nvSpPr>
+        <p:spPr/>
+        <p:txBody>
+          <a:bodyPr/>
+          <a:lstStyle/>
+          <a:p>
+            <a:r>
+              <a:rPr kumimoji="1" lang="ja-JP" altLang="en-US" dirty="0"/>
+              <a:t>そのためには、</a:t>
+            </a:r>
+          </a:p>
+        </p:txBody>
+      </p:sp>
+      <p:sp>
+        <p:nvSpPr>
+          <p:cNvPr id="3" name="コンテンツ プレースホルダー 2">
+            <a:extLst>
+              <a:ext uri="{FF2B5EF4-FFF2-40B4-BE49-F238E27FC236}">
+                <a16:creationId xmlns:a16="http://schemas.microsoft.com/office/drawing/2014/main" id="{55417DB8-36A4-4945-C118-6546101FE524}"/>
+              </a:ext>
+            </a:extLst>
+          </p:cNvPr>
+          <p:cNvSpPr>
+            <a:spLocks noGrp="1"/>
+          </p:cNvSpPr>
+          <p:nvPr>
+            <p:ph idx="1"/>
+          </p:nvPr>
+        </p:nvSpPr>
+        <p:spPr/>
+        <p:txBody>
+          <a:bodyPr/>
+          <a:lstStyle/>
+          <a:p>
+            <a:pPr lvl="1"/>
+            <a:r>
+              <a:rPr kumimoji="1" lang="ja-JP" altLang="en-US" dirty="0"/>
+              <a:t>既存のアプリ</a:t>
+            </a:r>
+            <a:endParaRPr kumimoji="1" lang="en-US" altLang="ja-JP" dirty="0"/>
+          </a:p>
+          <a:p>
+            <a:pPr lvl="1"/>
+            <a:r>
+              <a:rPr kumimoji="1" lang="ja-JP" altLang="en-US" dirty="0"/>
+              <a:t>撮った写真を「眺める」</a:t>
+            </a:r>
+            <a:br>
+              <a:rPr kumimoji="1" lang="en-US" altLang="ja-JP" dirty="0"/>
+            </a:br>
+            <a:r>
+              <a:rPr kumimoji="1" lang="ja-JP" altLang="en-US" dirty="0"/>
+              <a:t>これでは体験とは言えない</a:t>
+            </a:r>
+            <a:endParaRPr kumimoji="1" lang="en-US" altLang="ja-JP" dirty="0"/>
+          </a:p>
+          <a:p>
+            <a:pPr lvl="1"/>
+            <a:endParaRPr lang="en-US" altLang="ja-JP" dirty="0"/>
+          </a:p>
+          <a:p>
+            <a:pPr lvl="1"/>
+            <a:r>
+              <a:rPr lang="ja-JP" altLang="en-US" dirty="0"/>
+              <a:t>視覚以外の情報を記録して「臨場感のある」体験を</a:t>
+            </a:r>
+            <a:br>
+              <a:rPr lang="en-US" altLang="ja-JP" dirty="0"/>
+            </a:br>
+            <a:r>
+              <a:rPr lang="ja-JP" altLang="en-US" dirty="0"/>
+              <a:t>環境音、人の声、振動 </a:t>
+            </a:r>
+            <a:r>
+              <a:rPr lang="en-US" altLang="ja-JP" dirty="0"/>
+              <a:t>etc..</a:t>
+            </a:r>
+          </a:p>
+        </p:txBody>
+      </p:sp>
+    </p:spTree>
+    <p:extLst>
+      <p:ext uri="{BB962C8B-B14F-4D97-AF65-F5344CB8AC3E}">
+        <p14:creationId xmlns:p14="http://schemas.microsoft.com/office/powerpoint/2010/main" val="34850210"/>
+      </p:ext>
+    </p:extLst>
+  </p:cSld>
+  <p:clrMapOvr>
+    <a:masterClrMapping/>
+  </p:clrMapOvr>
+</p:sld>
+</file>
+
+<file path=ppt/slides/slide7.xml><?xml version="1.0" encoding="utf-8"?>
+<p:sld xmlns:a="http://schemas.openxmlformats.org/drawingml/2006/main" xmlns:r="http://schemas.openxmlformats.org/officeDocument/2006/relationships" xmlns:p="http://schemas.openxmlformats.org/presentationml/2006/main">
+  <p:cSld>
+    <p:spTree>
+      <p:nvGrpSpPr>
+        <p:cNvPr id="1" name=""/>
+        <p:cNvGrpSpPr/>
+        <p:nvPr/>
+      </p:nvGrpSpPr>
+      <p:grpSpPr>
+        <a:xfrm>
+          <a:off x="0" y="0"/>
+          <a:ext cx="0" cy="0"/>
+          <a:chOff x="0" y="0"/>
+          <a:chExt cx="0" cy="0"/>
+        </a:xfrm>
+      </p:grpSpPr>
+      <p:sp>
+        <p:nvSpPr>
+          <p:cNvPr id="2" name="タイトル 1">
+            <a:extLst>
+              <a:ext uri="{FF2B5EF4-FFF2-40B4-BE49-F238E27FC236}">
+                <a16:creationId xmlns:a16="http://schemas.microsoft.com/office/drawing/2014/main" id="{A7E91961-98CD-BDCB-F688-9B0E472C5DBC}"/>
+              </a:ext>
+            </a:extLst>
+          </p:cNvPr>
+          <p:cNvSpPr>
+            <a:spLocks noGrp="1"/>
+          </p:cNvSpPr>
+          <p:nvPr>
+            <p:ph type="title"/>
+          </p:nvPr>
+        </p:nvSpPr>
+        <p:spPr/>
+        <p:txBody>
+          <a:bodyPr/>
+          <a:lstStyle/>
+          <a:p>
+            <a:endParaRPr kumimoji="1" lang="ja-JP" altLang="en-US"/>
+          </a:p>
+        </p:txBody>
+      </p:sp>
+      <p:sp>
+        <p:nvSpPr>
+          <p:cNvPr id="3" name="コンテンツ プレースホルダー 2">
+            <a:extLst>
+              <a:ext uri="{FF2B5EF4-FFF2-40B4-BE49-F238E27FC236}">
+                <a16:creationId xmlns:a16="http://schemas.microsoft.com/office/drawing/2014/main" id="{F0C08884-5C59-88A3-CB68-C69270083DA9}"/>
+              </a:ext>
+            </a:extLst>
+          </p:cNvPr>
+          <p:cNvSpPr>
+            <a:spLocks noGrp="1"/>
+          </p:cNvSpPr>
+          <p:nvPr>
+            <p:ph idx="1"/>
+          </p:nvPr>
+        </p:nvSpPr>
+        <p:spPr/>
+        <p:txBody>
+          <a:bodyPr/>
+          <a:lstStyle/>
+          <a:p>
+            <a:endParaRPr kumimoji="1" lang="ja-JP" altLang="en-US"/>
+          </a:p>
+        </p:txBody>
+      </p:sp>
+    </p:spTree>
+    <p:extLst>
+      <p:ext uri="{BB962C8B-B14F-4D97-AF65-F5344CB8AC3E}">
+        <p14:creationId xmlns:p14="http://schemas.microsoft.com/office/powerpoint/2010/main" val="3019728153"/>
+      </p:ext>
+    </p:extLst>
+  </p:cSld>
+  <p:clrMapOvr>
+    <a:masterClrMapping/>
+  </p:clrMapOvr>
+</p:sld>
+</file>
+
+<file path=ppt/slides/slide8.xml><?xml version="1.0" encoding="utf-8"?>
+<p:sld xmlns:a="http://schemas.openxmlformats.org/drawingml/2006/main" xmlns:r="http://schemas.openxmlformats.org/officeDocument/2006/relationships" xmlns:p="http://schemas.openxmlformats.org/presentationml/2006/main">
+  <p:cSld>
+    <p:spTree>
+      <p:nvGrpSpPr>
+        <p:cNvPr id="1" name=""/>
+        <p:cNvGrpSpPr/>
+        <p:nvPr/>
+      </p:nvGrpSpPr>
+      <p:grpSpPr>
+        <a:xfrm>
+          <a:off x="0" y="0"/>
+          <a:ext cx="0" cy="0"/>
+          <a:chOff x="0" y="0"/>
+          <a:chExt cx="0" cy="0"/>
+        </a:xfrm>
+      </p:grpSpPr>
+      <p:sp>
+        <p:nvSpPr>
+          <p:cNvPr id="2" name="タイトル 1">
+            <a:extLst>
+              <a:ext uri="{FF2B5EF4-FFF2-40B4-BE49-F238E27FC236}">
+                <a16:creationId xmlns:a16="http://schemas.microsoft.com/office/drawing/2014/main" id="{4CEDAD86-CABB-86E9-C585-79C4AD292F88}"/>
+              </a:ext>
+            </a:extLst>
+          </p:cNvPr>
+          <p:cNvSpPr>
+            <a:spLocks noGrp="1"/>
+          </p:cNvSpPr>
+          <p:nvPr>
+            <p:ph type="title"/>
+          </p:nvPr>
+        </p:nvSpPr>
+        <p:spPr/>
+        <p:txBody>
+          <a:bodyPr/>
+          <a:lstStyle/>
+          <a:p>
+            <a:endParaRPr kumimoji="1" lang="ja-JP" altLang="en-US"/>
+          </a:p>
+        </p:txBody>
+      </p:sp>
+      <p:sp>
+        <p:nvSpPr>
+          <p:cNvPr id="3" name="コンテンツ プレースホルダー 2">
+            <a:extLst>
+              <a:ext uri="{FF2B5EF4-FFF2-40B4-BE49-F238E27FC236}">
+                <a16:creationId xmlns:a16="http://schemas.microsoft.com/office/drawing/2014/main" id="{E7682460-594A-EFF5-C8A2-62FAF19F5F11}"/>
+              </a:ext>
+            </a:extLst>
+          </p:cNvPr>
+          <p:cNvSpPr>
+            <a:spLocks noGrp="1"/>
+          </p:cNvSpPr>
+          <p:nvPr>
+            <p:ph idx="1"/>
+          </p:nvPr>
+        </p:nvSpPr>
+        <p:spPr/>
+        <p:txBody>
+          <a:bodyPr/>
+          <a:lstStyle/>
+          <a:p>
+            <a:endParaRPr kumimoji="1" lang="ja-JP" altLang="en-US"/>
+          </a:p>
+        </p:txBody>
+      </p:sp>
+    </p:spTree>
+    <p:extLst>
+      <p:ext uri="{BB962C8B-B14F-4D97-AF65-F5344CB8AC3E}">
+        <p14:creationId xmlns:p14="http://schemas.microsoft.com/office/powerpoint/2010/main" val="3786158151"/>
       </p:ext>
     </p:extLst>
   </p:cSld>
@@ -4181,4 +6061,299 @@
     </a:ext>
   </a:extLst>
 </a:theme>
+</file>
+
+<file path=ppt/theme/theme2.xml><?xml version="1.0" encoding="utf-8"?>
+<a:theme xmlns:a="http://schemas.openxmlformats.org/drawingml/2006/main" name="Office テーマ">
+  <a:themeElements>
+    <a:clrScheme name="Office">
+      <a:dk1>
+        <a:sysClr val="windowText" lastClr="000000"/>
+      </a:dk1>
+      <a:lt1>
+        <a:sysClr val="window" lastClr="FFFFFF"/>
+      </a:lt1>
+      <a:dk2>
+        <a:srgbClr val="44546A"/>
+      </a:dk2>
+      <a:lt2>
+        <a:srgbClr val="E7E6E6"/>
+      </a:lt2>
+      <a:accent1>
+        <a:srgbClr val="4472C4"/>
+      </a:accent1>
+      <a:accent2>
+        <a:srgbClr val="ED7D31"/>
+      </a:accent2>
+      <a:accent3>
+        <a:srgbClr val="A5A5A5"/>
+      </a:accent3>
+      <a:accent4>
+        <a:srgbClr val="FFC000"/>
+      </a:accent4>
+      <a:accent5>
+        <a:srgbClr val="5B9BD5"/>
+      </a:accent5>
+      <a:accent6>
+        <a:srgbClr val="70AD47"/>
+      </a:accent6>
+      <a:hlink>
+        <a:srgbClr val="0563C1"/>
+      </a:hlink>
+      <a:folHlink>
+        <a:srgbClr val="954F72"/>
+      </a:folHlink>
+    </a:clrScheme>
+    <a:fontScheme name="Office">
+      <a:majorFont>
+        <a:latin typeface="游ゴシック Light" panose="020F0302020204030204"/>
+        <a:ea typeface=""/>
+        <a:cs typeface=""/>
+        <a:font script="Jpan" typeface="游ゴシック Light"/>
+        <a:font script="Hang" typeface="맑은 고딕"/>
+        <a:font script="Hans" typeface="等线 Light"/>
+        <a:font script="Hant" typeface="新細明體"/>
+        <a:font script="Arab" typeface="Times New Roman"/>
+        <a:font script="Hebr" typeface="Times New Roman"/>
+        <a:font script="Thai" typeface="Angsana New"/>
+        <a:font script="Ethi" typeface="Nyala"/>
+        <a:font script="Beng" typeface="Vrinda"/>
+        <a:font script="Gujr" typeface="Shruti"/>
+        <a:font script="Khmr" typeface="MoolBoran"/>
+        <a:font script="Knda" typeface="Tunga"/>
+        <a:font script="Guru" typeface="Raavi"/>
+        <a:font script="Cans" typeface="Euphemia"/>
+        <a:font script="Cher" typeface="Plantagenet Cherokee"/>
+        <a:font script="Yiii" typeface="Microsoft Yi Baiti"/>
+        <a:font script="Tibt" typeface="Microsoft Himalaya"/>
+        <a:font script="Thaa" typeface="MV Boli"/>
+        <a:font script="Deva" typeface="Mangal"/>
+        <a:font script="Telu" typeface="Gautami"/>
+        <a:font script="Taml" typeface="Latha"/>
+        <a:font script="Syrc" typeface="Estrangelo Edessa"/>
+        <a:font script="Orya" typeface="Kalinga"/>
+        <a:font script="Mlym" typeface="Kartika"/>
+        <a:font script="Laoo" typeface="DokChampa"/>
+        <a:font script="Sinh" typeface="Iskoola Pota"/>
+        <a:font script="Mong" typeface="Mongolian Baiti"/>
+        <a:font script="Viet" typeface="Times New Roman"/>
+        <a:font script="Uigh" typeface="Microsoft Uighur"/>
+        <a:font script="Geor" typeface="Sylfaen"/>
+        <a:font script="Armn" typeface="Arial"/>
+        <a:font script="Bugi" typeface="Leelawadee UI"/>
+        <a:font script="Bopo" typeface="Microsoft JhengHei"/>
+        <a:font script="Java" typeface="Javanese Text"/>
+        <a:font script="Lisu" typeface="Segoe UI"/>
+        <a:font script="Mymr" typeface="Myanmar Text"/>
+        <a:font script="Nkoo" typeface="Ebrima"/>
+        <a:font script="Olck" typeface="Nirmala UI"/>
+        <a:font script="Osma" typeface="Ebrima"/>
+        <a:font script="Phag" typeface="Phagspa"/>
+        <a:font script="Syrn" typeface="Estrangelo Edessa"/>
+        <a:font script="Syrj" typeface="Estrangelo Edessa"/>
+        <a:font script="Syre" typeface="Estrangelo Edessa"/>
+        <a:font script="Sora" typeface="Nirmala UI"/>
+        <a:font script="Tale" typeface="Microsoft Tai Le"/>
+        <a:font script="Talu" typeface="Microsoft New Tai Lue"/>
+        <a:font script="Tfng" typeface="Ebrima"/>
+      </a:majorFont>
+      <a:minorFont>
+        <a:latin typeface="游ゴシック" panose="020F0502020204030204"/>
+        <a:ea typeface=""/>
+        <a:cs typeface=""/>
+        <a:font script="Jpan" typeface="游ゴシック"/>
+        <a:font script="Hang" typeface="맑은 고딕"/>
+        <a:font script="Hans" typeface="等线"/>
+        <a:font script="Hant" typeface="新細明體"/>
+        <a:font script="Arab" typeface="Arial"/>
+        <a:font script="Hebr" typeface="Arial"/>
+        <a:font script="Thai" typeface="Cordia New"/>
+        <a:font script="Ethi" typeface="Nyala"/>
+        <a:font script="Beng" typeface="Vrinda"/>
+        <a:font script="Gujr" typeface="Shruti"/>
+        <a:font script="Khmr" typeface="DaunPenh"/>
+        <a:font script="Knda" typeface="Tunga"/>
+        <a:font script="Guru" typeface="Raavi"/>
+        <a:font script="Cans" typeface="Euphemia"/>
+        <a:font script="Cher" typeface="Plantagenet Cherokee"/>
+        <a:font script="Yiii" typeface="Microsoft Yi Baiti"/>
+        <a:font script="Tibt" typeface="Microsoft Himalaya"/>
+        <a:font script="Thaa" typeface="MV Boli"/>
+        <a:font script="Deva" typeface="Mangal"/>
+        <a:font script="Telu" typeface="Gautami"/>
+        <a:font script="Taml" typeface="Latha"/>
+        <a:font script="Syrc" typeface="Estrangelo Edessa"/>
+        <a:font script="Orya" typeface="Kalinga"/>
+        <a:font script="Mlym" typeface="Kartika"/>
+        <a:font script="Laoo" typeface="DokChampa"/>
+        <a:font script="Sinh" typeface="Iskoola Pota"/>
+        <a:font script="Mong" typeface="Mongolian Baiti"/>
+        <a:font script="Viet" typeface="Arial"/>
+        <a:font script="Uigh" typeface="Microsoft Uighur"/>
+        <a:font script="Geor" typeface="Sylfaen"/>
+        <a:font script="Armn" typeface="Arial"/>
+        <a:font script="Bugi" typeface="Leelawadee UI"/>
+        <a:font script="Bopo" typeface="Microsoft JhengHei"/>
+        <a:font script="Java" typeface="Javanese Text"/>
+        <a:font script="Lisu" typeface="Segoe UI"/>
+        <a:font script="Mymr" typeface="Myanmar Text"/>
+        <a:font script="Nkoo" typeface="Ebrima"/>
+        <a:font script="Olck" typeface="Nirmala UI"/>
+        <a:font script="Osma" typeface="Ebrima"/>
+        <a:font script="Phag" typeface="Phagspa"/>
+        <a:font script="Syrn" typeface="Estrangelo Edessa"/>
+        <a:font script="Syrj" typeface="Estrangelo Edessa"/>
+        <a:font script="Syre" typeface="Estrangelo Edessa"/>
+        <a:font script="Sora" typeface="Nirmala UI"/>
+        <a:font script="Tale" typeface="Microsoft Tai Le"/>
+        <a:font script="Talu" typeface="Microsoft New Tai Lue"/>
+        <a:font script="Tfng" typeface="Ebrima"/>
+      </a:minorFont>
+    </a:fontScheme>
+    <a:fmtScheme name="Office">
+      <a:fillStyleLst>
+        <a:solidFill>
+          <a:schemeClr val="phClr"/>
+        </a:solidFill>
+        <a:gradFill rotWithShape="1">
+          <a:gsLst>
+            <a:gs pos="0">
+              <a:schemeClr val="phClr">
+                <a:lumMod val="110000"/>
+                <a:satMod val="105000"/>
+                <a:tint val="67000"/>
+              </a:schemeClr>
+            </a:gs>
+            <a:gs pos="50000">
+              <a:schemeClr val="phClr">
+                <a:lumMod val="105000"/>
+                <a:satMod val="103000"/>
+                <a:tint val="73000"/>
+              </a:schemeClr>
+            </a:gs>
+            <a:gs pos="100000">
+              <a:schemeClr val="phClr">
+                <a:lumMod val="105000"/>
+                <a:satMod val="109000"/>
+                <a:tint val="81000"/>
+              </a:schemeClr>
+            </a:gs>
+          </a:gsLst>
+          <a:lin ang="5400000" scaled="0"/>
+        </a:gradFill>
+        <a:gradFill rotWithShape="1">
+          <a:gsLst>
+            <a:gs pos="0">
+              <a:schemeClr val="phClr">
+                <a:satMod val="103000"/>
+                <a:lumMod val="102000"/>
+                <a:tint val="94000"/>
+              </a:schemeClr>
+            </a:gs>
+            <a:gs pos="50000">
+              <a:schemeClr val="phClr">
+                <a:satMod val="110000"/>
+                <a:lumMod val="100000"/>
+                <a:shade val="100000"/>
+              </a:schemeClr>
+            </a:gs>
+            <a:gs pos="100000">
+              <a:schemeClr val="phClr">
+                <a:lumMod val="99000"/>
+                <a:satMod val="120000"/>
+                <a:shade val="78000"/>
+              </a:schemeClr>
+            </a:gs>
+          </a:gsLst>
+          <a:lin ang="5400000" scaled="0"/>
+        </a:gradFill>
+      </a:fillStyleLst>
+      <a:lnStyleLst>
+        <a:ln w="6350" cap="flat" cmpd="sng" algn="ctr">
+          <a:solidFill>
+            <a:schemeClr val="phClr"/>
+          </a:solidFill>
+          <a:prstDash val="solid"/>
+          <a:miter lim="800000"/>
+        </a:ln>
+        <a:ln w="12700" cap="flat" cmpd="sng" algn="ctr">
+          <a:solidFill>
+            <a:schemeClr val="phClr"/>
+          </a:solidFill>
+          <a:prstDash val="solid"/>
+          <a:miter lim="800000"/>
+        </a:ln>
+        <a:ln w="19050" cap="flat" cmpd="sng" algn="ctr">
+          <a:solidFill>
+            <a:schemeClr val="phClr"/>
+          </a:solidFill>
+          <a:prstDash val="solid"/>
+          <a:miter lim="800000"/>
+        </a:ln>
+      </a:lnStyleLst>
+      <a:effectStyleLst>
+        <a:effectStyle>
+          <a:effectLst/>
+        </a:effectStyle>
+        <a:effectStyle>
+          <a:effectLst/>
+        </a:effectStyle>
+        <a:effectStyle>
+          <a:effectLst>
+            <a:outerShdw blurRad="57150" dist="19050" dir="5400000" algn="ctr" rotWithShape="0">
+              <a:srgbClr val="000000">
+                <a:alpha val="63000"/>
+              </a:srgbClr>
+            </a:outerShdw>
+          </a:effectLst>
+        </a:effectStyle>
+      </a:effectStyleLst>
+      <a:bgFillStyleLst>
+        <a:solidFill>
+          <a:schemeClr val="phClr"/>
+        </a:solidFill>
+        <a:solidFill>
+          <a:schemeClr val="phClr">
+            <a:tint val="95000"/>
+            <a:satMod val="170000"/>
+          </a:schemeClr>
+        </a:solidFill>
+        <a:gradFill rotWithShape="1">
+          <a:gsLst>
+            <a:gs pos="0">
+              <a:schemeClr val="phClr">
+                <a:tint val="93000"/>
+                <a:satMod val="150000"/>
+                <a:shade val="98000"/>
+                <a:lumMod val="102000"/>
+              </a:schemeClr>
+            </a:gs>
+            <a:gs pos="50000">
+              <a:schemeClr val="phClr">
+                <a:tint val="98000"/>
+                <a:satMod val="130000"/>
+                <a:shade val="90000"/>
+                <a:lumMod val="103000"/>
+              </a:schemeClr>
+            </a:gs>
+            <a:gs pos="100000">
+              <a:schemeClr val="phClr">
+                <a:shade val="63000"/>
+                <a:satMod val="120000"/>
+              </a:schemeClr>
+            </a:gs>
+          </a:gsLst>
+          <a:lin ang="5400000" scaled="0"/>
+        </a:gradFill>
+      </a:bgFillStyleLst>
+    </a:fmtScheme>
+  </a:themeElements>
+  <a:objectDefaults/>
+  <a:extraClrSchemeLst/>
+  <a:extLst>
+    <a:ext uri="{05A4C25C-085E-4340-85A3-A5531E510DB2}">
+      <thm15:themeFamily xmlns:thm15="http://schemas.microsoft.com/office/thememl/2012/main" name="Office Theme" id="{62F939B6-93AF-4DB8-9C6B-D6C7DFDC589F}" vid="{4A3C46E8-61CC-4603-A589-7422A47A8E4A}"/>
+    </a:ext>
+  </a:extLst>
+</a:theme>
 </file>